--- a/EDIFACT-Orders-POC.pptx
+++ b/EDIFACT-Orders-POC.pptx
@@ -138,7 +138,7 @@
           <p:cNvPr id="2" name="Title 1">
             <a:extLst>
               <a:ext uri="{FF2B5EF4-FFF2-40B4-BE49-F238E27FC236}">
-                <a16:creationId xmlns:a16="http://schemas.microsoft.com/office/drawing/2014/main" id="{6A068398-899D-A99F-D4F1-3D5EE0DB9CD8}"/>
+                <a16:creationId xmlns:a16="http://schemas.microsoft.com/office/drawing/2014/main" id="{21DB4469-7518-C731-9BC3-7901ED5EEDD8}"/>
               </a:ext>
             </a:extLst>
           </p:cNvPr>
@@ -175,7 +175,7 @@
           <p:cNvPr id="3" name="Subtitle 2">
             <a:extLst>
               <a:ext uri="{FF2B5EF4-FFF2-40B4-BE49-F238E27FC236}">
-                <a16:creationId xmlns:a16="http://schemas.microsoft.com/office/drawing/2014/main" id="{F7854795-F0C7-0842-47CC-10820259C8EA}"/>
+                <a16:creationId xmlns:a16="http://schemas.microsoft.com/office/drawing/2014/main" id="{FD10773B-26E5-916C-5E6D-50BC6D8375D5}"/>
               </a:ext>
             </a:extLst>
           </p:cNvPr>
@@ -245,7 +245,7 @@
           <p:cNvPr id="4" name="Date Placeholder 3">
             <a:extLst>
               <a:ext uri="{FF2B5EF4-FFF2-40B4-BE49-F238E27FC236}">
-                <a16:creationId xmlns:a16="http://schemas.microsoft.com/office/drawing/2014/main" id="{001761F3-ECAD-FE2F-1F43-C17709C0A82A}"/>
+                <a16:creationId xmlns:a16="http://schemas.microsoft.com/office/drawing/2014/main" id="{C199CC7F-9790-3D6D-7083-A977EEE53C9C}"/>
               </a:ext>
             </a:extLst>
           </p:cNvPr>
@@ -261,9 +261,9 @@
           <a:bodyPr/>
           <a:lstStyle/>
           <a:p>
-            <a:fld id="{A4317AF8-0AC5-4DAB-803D-4A0C4E3E6E10}" type="datetimeFigureOut">
+            <a:fld id="{05370C1C-FED6-47AC-B551-0F781BC50403}" type="datetimeFigureOut">
               <a:rPr lang="en-US" smtClean="0"/>
-              <a:t>10/21/2026</a:t>
+              <a:t>10/22/2026</a:t>
             </a:fld>
             <a:endParaRPr lang="en-US"/>
           </a:p>
@@ -274,7 +274,7 @@
           <p:cNvPr id="5" name="Footer Placeholder 4">
             <a:extLst>
               <a:ext uri="{FF2B5EF4-FFF2-40B4-BE49-F238E27FC236}">
-                <a16:creationId xmlns:a16="http://schemas.microsoft.com/office/drawing/2014/main" id="{2F128A0C-AE81-92CB-19D2-BA98273B5B4F}"/>
+                <a16:creationId xmlns:a16="http://schemas.microsoft.com/office/drawing/2014/main" id="{C2AF035A-6AC8-E2A8-18AD-5EB37D655581}"/>
               </a:ext>
             </a:extLst>
           </p:cNvPr>
@@ -299,7 +299,7 @@
           <p:cNvPr id="6" name="Slide Number Placeholder 5">
             <a:extLst>
               <a:ext uri="{FF2B5EF4-FFF2-40B4-BE49-F238E27FC236}">
-                <a16:creationId xmlns:a16="http://schemas.microsoft.com/office/drawing/2014/main" id="{5D3BD04F-834E-F7C5-3E73-2CBAA012FCF1}"/>
+                <a16:creationId xmlns:a16="http://schemas.microsoft.com/office/drawing/2014/main" id="{CBB55DDB-925D-87BB-F1FE-97459118E1E8}"/>
               </a:ext>
             </a:extLst>
           </p:cNvPr>
@@ -315,7 +315,7 @@
           <a:bodyPr/>
           <a:lstStyle/>
           <a:p>
-            <a:fld id="{5A6A93B6-5A97-4D4C-82E0-3C56D8FAE5F5}" type="slidenum">
+            <a:fld id="{39980B17-6112-4913-98A3-F2E9B2E28D71}" type="slidenum">
               <a:rPr lang="en-US" smtClean="0"/>
               <a:t>‹#›</a:t>
             </a:fld>
@@ -326,7 +326,7 @@
     </p:spTree>
     <p:extLst>
       <p:ext uri="{BB962C8B-B14F-4D97-AF65-F5344CB8AC3E}">
-        <p14:creationId xmlns:p14="http://schemas.microsoft.com/office/powerpoint/2010/main" val="2224301297"/>
+        <p14:creationId xmlns:p14="http://schemas.microsoft.com/office/powerpoint/2010/main" val="1793774482"/>
       </p:ext>
     </p:extLst>
   </p:cSld>
@@ -358,7 +358,7 @@
           <p:cNvPr id="2" name="Title 1">
             <a:extLst>
               <a:ext uri="{FF2B5EF4-FFF2-40B4-BE49-F238E27FC236}">
-                <a16:creationId xmlns:a16="http://schemas.microsoft.com/office/drawing/2014/main" id="{347D0344-1B1A-968D-413F-F84C822E6ED9}"/>
+                <a16:creationId xmlns:a16="http://schemas.microsoft.com/office/drawing/2014/main" id="{A5870A34-AA03-9B4C-D6DA-BB786BD98555}"/>
               </a:ext>
             </a:extLst>
           </p:cNvPr>
@@ -386,7 +386,7 @@
           <p:cNvPr id="3" name="Vertical Text Placeholder 2">
             <a:extLst>
               <a:ext uri="{FF2B5EF4-FFF2-40B4-BE49-F238E27FC236}">
-                <a16:creationId xmlns:a16="http://schemas.microsoft.com/office/drawing/2014/main" id="{5A4B99CB-73DF-6518-9933-7882E03A5264}"/>
+                <a16:creationId xmlns:a16="http://schemas.microsoft.com/office/drawing/2014/main" id="{8813630D-A6F0-BC30-7EBB-1FD8B21E3891}"/>
               </a:ext>
             </a:extLst>
           </p:cNvPr>
@@ -443,7 +443,7 @@
           <p:cNvPr id="4" name="Date Placeholder 3">
             <a:extLst>
               <a:ext uri="{FF2B5EF4-FFF2-40B4-BE49-F238E27FC236}">
-                <a16:creationId xmlns:a16="http://schemas.microsoft.com/office/drawing/2014/main" id="{E6354C47-AF92-C5ED-4555-D281A37C0917}"/>
+                <a16:creationId xmlns:a16="http://schemas.microsoft.com/office/drawing/2014/main" id="{124F8B5F-5AE9-3395-EB30-1704A99A5787}"/>
               </a:ext>
             </a:extLst>
           </p:cNvPr>
@@ -459,9 +459,9 @@
           <a:bodyPr/>
           <a:lstStyle/>
           <a:p>
-            <a:fld id="{A4317AF8-0AC5-4DAB-803D-4A0C4E3E6E10}" type="datetimeFigureOut">
+            <a:fld id="{05370C1C-FED6-47AC-B551-0F781BC50403}" type="datetimeFigureOut">
               <a:rPr lang="en-US" smtClean="0"/>
-              <a:t>10/21/2026</a:t>
+              <a:t>10/22/2026</a:t>
             </a:fld>
             <a:endParaRPr lang="en-US"/>
           </a:p>
@@ -472,7 +472,7 @@
           <p:cNvPr id="5" name="Footer Placeholder 4">
             <a:extLst>
               <a:ext uri="{FF2B5EF4-FFF2-40B4-BE49-F238E27FC236}">
-                <a16:creationId xmlns:a16="http://schemas.microsoft.com/office/drawing/2014/main" id="{013C8475-1A91-9638-35A1-FED08824BA25}"/>
+                <a16:creationId xmlns:a16="http://schemas.microsoft.com/office/drawing/2014/main" id="{06FE2AD0-988D-E9BC-6358-3D93BCEC6EDF}"/>
               </a:ext>
             </a:extLst>
           </p:cNvPr>
@@ -497,7 +497,7 @@
           <p:cNvPr id="6" name="Slide Number Placeholder 5">
             <a:extLst>
               <a:ext uri="{FF2B5EF4-FFF2-40B4-BE49-F238E27FC236}">
-                <a16:creationId xmlns:a16="http://schemas.microsoft.com/office/drawing/2014/main" id="{B48126C2-EC2F-B25D-161A-4C04352A8B41}"/>
+                <a16:creationId xmlns:a16="http://schemas.microsoft.com/office/drawing/2014/main" id="{9985B09F-3537-BBC4-9616-83C677F6AF62}"/>
               </a:ext>
             </a:extLst>
           </p:cNvPr>
@@ -513,7 +513,7 @@
           <a:bodyPr/>
           <a:lstStyle/>
           <a:p>
-            <a:fld id="{5A6A93B6-5A97-4D4C-82E0-3C56D8FAE5F5}" type="slidenum">
+            <a:fld id="{39980B17-6112-4913-98A3-F2E9B2E28D71}" type="slidenum">
               <a:rPr lang="en-US" smtClean="0"/>
               <a:t>‹#›</a:t>
             </a:fld>
@@ -524,7 +524,7 @@
     </p:spTree>
     <p:extLst>
       <p:ext uri="{BB962C8B-B14F-4D97-AF65-F5344CB8AC3E}">
-        <p14:creationId xmlns:p14="http://schemas.microsoft.com/office/powerpoint/2010/main" val="3568081832"/>
+        <p14:creationId xmlns:p14="http://schemas.microsoft.com/office/powerpoint/2010/main" val="3278083095"/>
       </p:ext>
     </p:extLst>
   </p:cSld>
@@ -556,7 +556,7 @@
           <p:cNvPr id="2" name="Vertical Title 1">
             <a:extLst>
               <a:ext uri="{FF2B5EF4-FFF2-40B4-BE49-F238E27FC236}">
-                <a16:creationId xmlns:a16="http://schemas.microsoft.com/office/drawing/2014/main" id="{AC7266E9-FEBD-4EF6-D9F8-E78F02F98EEB}"/>
+                <a16:creationId xmlns:a16="http://schemas.microsoft.com/office/drawing/2014/main" id="{4CFDCC12-7581-CE7B-169A-B2C2164533D8}"/>
               </a:ext>
             </a:extLst>
           </p:cNvPr>
@@ -589,7 +589,7 @@
           <p:cNvPr id="3" name="Vertical Text Placeholder 2">
             <a:extLst>
               <a:ext uri="{FF2B5EF4-FFF2-40B4-BE49-F238E27FC236}">
-                <a16:creationId xmlns:a16="http://schemas.microsoft.com/office/drawing/2014/main" id="{49A75A86-1716-CD9B-9FCE-5ABFD88E49A8}"/>
+                <a16:creationId xmlns:a16="http://schemas.microsoft.com/office/drawing/2014/main" id="{A36BF93D-733D-206A-65E2-35F5085E14D0}"/>
               </a:ext>
             </a:extLst>
           </p:cNvPr>
@@ -651,7 +651,7 @@
           <p:cNvPr id="4" name="Date Placeholder 3">
             <a:extLst>
               <a:ext uri="{FF2B5EF4-FFF2-40B4-BE49-F238E27FC236}">
-                <a16:creationId xmlns:a16="http://schemas.microsoft.com/office/drawing/2014/main" id="{4A792FAE-75DC-8DEB-355E-A975614C99CD}"/>
+                <a16:creationId xmlns:a16="http://schemas.microsoft.com/office/drawing/2014/main" id="{924B7B2A-7996-3A79-81DB-8888FD512502}"/>
               </a:ext>
             </a:extLst>
           </p:cNvPr>
@@ -667,9 +667,9 @@
           <a:bodyPr/>
           <a:lstStyle/>
           <a:p>
-            <a:fld id="{A4317AF8-0AC5-4DAB-803D-4A0C4E3E6E10}" type="datetimeFigureOut">
+            <a:fld id="{05370C1C-FED6-47AC-B551-0F781BC50403}" type="datetimeFigureOut">
               <a:rPr lang="en-US" smtClean="0"/>
-              <a:t>10/21/2026</a:t>
+              <a:t>10/22/2026</a:t>
             </a:fld>
             <a:endParaRPr lang="en-US"/>
           </a:p>
@@ -680,7 +680,7 @@
           <p:cNvPr id="5" name="Footer Placeholder 4">
             <a:extLst>
               <a:ext uri="{FF2B5EF4-FFF2-40B4-BE49-F238E27FC236}">
-                <a16:creationId xmlns:a16="http://schemas.microsoft.com/office/drawing/2014/main" id="{00B3F799-5200-9489-7A4D-5A85976AB659}"/>
+                <a16:creationId xmlns:a16="http://schemas.microsoft.com/office/drawing/2014/main" id="{052CBD8B-9462-9807-68A9-3E567F13E62F}"/>
               </a:ext>
             </a:extLst>
           </p:cNvPr>
@@ -705,7 +705,7 @@
           <p:cNvPr id="6" name="Slide Number Placeholder 5">
             <a:extLst>
               <a:ext uri="{FF2B5EF4-FFF2-40B4-BE49-F238E27FC236}">
-                <a16:creationId xmlns:a16="http://schemas.microsoft.com/office/drawing/2014/main" id="{0A104A94-0CBC-41CF-4B9A-E6ADE9F1747D}"/>
+                <a16:creationId xmlns:a16="http://schemas.microsoft.com/office/drawing/2014/main" id="{4B8158E2-6DD2-5E3F-6CDD-07C2971AD150}"/>
               </a:ext>
             </a:extLst>
           </p:cNvPr>
@@ -721,7 +721,7 @@
           <a:bodyPr/>
           <a:lstStyle/>
           <a:p>
-            <a:fld id="{5A6A93B6-5A97-4D4C-82E0-3C56D8FAE5F5}" type="slidenum">
+            <a:fld id="{39980B17-6112-4913-98A3-F2E9B2E28D71}" type="slidenum">
               <a:rPr lang="en-US" smtClean="0"/>
               <a:t>‹#›</a:t>
             </a:fld>
@@ -732,7 +732,7 @@
     </p:spTree>
     <p:extLst>
       <p:ext uri="{BB962C8B-B14F-4D97-AF65-F5344CB8AC3E}">
-        <p14:creationId xmlns:p14="http://schemas.microsoft.com/office/powerpoint/2010/main" val="654555997"/>
+        <p14:creationId xmlns:p14="http://schemas.microsoft.com/office/powerpoint/2010/main" val="1299715090"/>
       </p:ext>
     </p:extLst>
   </p:cSld>
@@ -764,7 +764,7 @@
           <p:cNvPr id="2" name="Title 1">
             <a:extLst>
               <a:ext uri="{FF2B5EF4-FFF2-40B4-BE49-F238E27FC236}">
-                <a16:creationId xmlns:a16="http://schemas.microsoft.com/office/drawing/2014/main" id="{B1751F19-189B-BF76-387C-D47F551DE948}"/>
+                <a16:creationId xmlns:a16="http://schemas.microsoft.com/office/drawing/2014/main" id="{06C3BD4D-9AB7-2270-8BE4-3BC9AE1C0477}"/>
               </a:ext>
             </a:extLst>
           </p:cNvPr>
@@ -792,7 +792,7 @@
           <p:cNvPr id="3" name="Content Placeholder 2">
             <a:extLst>
               <a:ext uri="{FF2B5EF4-FFF2-40B4-BE49-F238E27FC236}">
-                <a16:creationId xmlns:a16="http://schemas.microsoft.com/office/drawing/2014/main" id="{CD4162D2-8C1E-C6C4-7D41-81F54AA2221E}"/>
+                <a16:creationId xmlns:a16="http://schemas.microsoft.com/office/drawing/2014/main" id="{8E9D506C-3FD5-69D4-789E-ADC9699B19E4}"/>
               </a:ext>
             </a:extLst>
           </p:cNvPr>
@@ -849,7 +849,7 @@
           <p:cNvPr id="4" name="Date Placeholder 3">
             <a:extLst>
               <a:ext uri="{FF2B5EF4-FFF2-40B4-BE49-F238E27FC236}">
-                <a16:creationId xmlns:a16="http://schemas.microsoft.com/office/drawing/2014/main" id="{79B196DD-C715-30E4-0DB5-526855CD5AEF}"/>
+                <a16:creationId xmlns:a16="http://schemas.microsoft.com/office/drawing/2014/main" id="{B0D72F91-284C-0762-792E-B384A9844E95}"/>
               </a:ext>
             </a:extLst>
           </p:cNvPr>
@@ -865,9 +865,9 @@
           <a:bodyPr/>
           <a:lstStyle/>
           <a:p>
-            <a:fld id="{A4317AF8-0AC5-4DAB-803D-4A0C4E3E6E10}" type="datetimeFigureOut">
+            <a:fld id="{05370C1C-FED6-47AC-B551-0F781BC50403}" type="datetimeFigureOut">
               <a:rPr lang="en-US" smtClean="0"/>
-              <a:t>10/21/2026</a:t>
+              <a:t>10/22/2026</a:t>
             </a:fld>
             <a:endParaRPr lang="en-US"/>
           </a:p>
@@ -878,7 +878,7 @@
           <p:cNvPr id="5" name="Footer Placeholder 4">
             <a:extLst>
               <a:ext uri="{FF2B5EF4-FFF2-40B4-BE49-F238E27FC236}">
-                <a16:creationId xmlns:a16="http://schemas.microsoft.com/office/drawing/2014/main" id="{29BF43FB-C285-D622-AAC2-730E91A306E8}"/>
+                <a16:creationId xmlns:a16="http://schemas.microsoft.com/office/drawing/2014/main" id="{A1F5CC73-D1C9-FF82-7F8A-AF18C1D27A7F}"/>
               </a:ext>
             </a:extLst>
           </p:cNvPr>
@@ -903,7 +903,7 @@
           <p:cNvPr id="6" name="Slide Number Placeholder 5">
             <a:extLst>
               <a:ext uri="{FF2B5EF4-FFF2-40B4-BE49-F238E27FC236}">
-                <a16:creationId xmlns:a16="http://schemas.microsoft.com/office/drawing/2014/main" id="{A52A2448-6380-5342-6905-4931094BEE92}"/>
+                <a16:creationId xmlns:a16="http://schemas.microsoft.com/office/drawing/2014/main" id="{30F15DC7-273B-13A1-7143-B25CEE42562C}"/>
               </a:ext>
             </a:extLst>
           </p:cNvPr>
@@ -919,7 +919,7 @@
           <a:bodyPr/>
           <a:lstStyle/>
           <a:p>
-            <a:fld id="{5A6A93B6-5A97-4D4C-82E0-3C56D8FAE5F5}" type="slidenum">
+            <a:fld id="{39980B17-6112-4913-98A3-F2E9B2E28D71}" type="slidenum">
               <a:rPr lang="en-US" smtClean="0"/>
               <a:t>‹#›</a:t>
             </a:fld>
@@ -930,7 +930,7 @@
     </p:spTree>
     <p:extLst>
       <p:ext uri="{BB962C8B-B14F-4D97-AF65-F5344CB8AC3E}">
-        <p14:creationId xmlns:p14="http://schemas.microsoft.com/office/powerpoint/2010/main" val="3019087441"/>
+        <p14:creationId xmlns:p14="http://schemas.microsoft.com/office/powerpoint/2010/main" val="3454607541"/>
       </p:ext>
     </p:extLst>
   </p:cSld>
@@ -962,7 +962,7 @@
           <p:cNvPr id="2" name="Title 1">
             <a:extLst>
               <a:ext uri="{FF2B5EF4-FFF2-40B4-BE49-F238E27FC236}">
-                <a16:creationId xmlns:a16="http://schemas.microsoft.com/office/drawing/2014/main" id="{4BF7CACC-87D1-D0B0-F775-6410C1FACF83}"/>
+                <a16:creationId xmlns:a16="http://schemas.microsoft.com/office/drawing/2014/main" id="{C2017658-AD15-DA84-14A0-190E8E1126B0}"/>
               </a:ext>
             </a:extLst>
           </p:cNvPr>
@@ -999,7 +999,7 @@
           <p:cNvPr id="3" name="Text Placeholder 2">
             <a:extLst>
               <a:ext uri="{FF2B5EF4-FFF2-40B4-BE49-F238E27FC236}">
-                <a16:creationId xmlns:a16="http://schemas.microsoft.com/office/drawing/2014/main" id="{9A604544-E4CC-3322-01C0-52440478FE20}"/>
+                <a16:creationId xmlns:a16="http://schemas.microsoft.com/office/drawing/2014/main" id="{BC9B9F02-1AA9-2BEF-C7A2-B5C63A7994DA}"/>
               </a:ext>
             </a:extLst>
           </p:cNvPr>
@@ -1124,7 +1124,7 @@
           <p:cNvPr id="4" name="Date Placeholder 3">
             <a:extLst>
               <a:ext uri="{FF2B5EF4-FFF2-40B4-BE49-F238E27FC236}">
-                <a16:creationId xmlns:a16="http://schemas.microsoft.com/office/drawing/2014/main" id="{7873DB83-9943-B97B-4215-D6C2A31ADD88}"/>
+                <a16:creationId xmlns:a16="http://schemas.microsoft.com/office/drawing/2014/main" id="{3582D573-2590-5188-62E7-76AE12D24A24}"/>
               </a:ext>
             </a:extLst>
           </p:cNvPr>
@@ -1140,9 +1140,9 @@
           <a:bodyPr/>
           <a:lstStyle/>
           <a:p>
-            <a:fld id="{A4317AF8-0AC5-4DAB-803D-4A0C4E3E6E10}" type="datetimeFigureOut">
+            <a:fld id="{05370C1C-FED6-47AC-B551-0F781BC50403}" type="datetimeFigureOut">
               <a:rPr lang="en-US" smtClean="0"/>
-              <a:t>10/21/2026</a:t>
+              <a:t>10/22/2026</a:t>
             </a:fld>
             <a:endParaRPr lang="en-US"/>
           </a:p>
@@ -1153,7 +1153,7 @@
           <p:cNvPr id="5" name="Footer Placeholder 4">
             <a:extLst>
               <a:ext uri="{FF2B5EF4-FFF2-40B4-BE49-F238E27FC236}">
-                <a16:creationId xmlns:a16="http://schemas.microsoft.com/office/drawing/2014/main" id="{38A2634A-D4CF-65D4-32F5-9A56B3E23C7A}"/>
+                <a16:creationId xmlns:a16="http://schemas.microsoft.com/office/drawing/2014/main" id="{E16A2347-1D73-C3F4-A0C1-B7BA784DAA6E}"/>
               </a:ext>
             </a:extLst>
           </p:cNvPr>
@@ -1178,7 +1178,7 @@
           <p:cNvPr id="6" name="Slide Number Placeholder 5">
             <a:extLst>
               <a:ext uri="{FF2B5EF4-FFF2-40B4-BE49-F238E27FC236}">
-                <a16:creationId xmlns:a16="http://schemas.microsoft.com/office/drawing/2014/main" id="{0F542711-42CD-EC13-067D-7C2D5A91CFA7}"/>
+                <a16:creationId xmlns:a16="http://schemas.microsoft.com/office/drawing/2014/main" id="{E38887FB-AF9D-A360-7BB4-96AEC1A5DB4A}"/>
               </a:ext>
             </a:extLst>
           </p:cNvPr>
@@ -1194,7 +1194,7 @@
           <a:bodyPr/>
           <a:lstStyle/>
           <a:p>
-            <a:fld id="{5A6A93B6-5A97-4D4C-82E0-3C56D8FAE5F5}" type="slidenum">
+            <a:fld id="{39980B17-6112-4913-98A3-F2E9B2E28D71}" type="slidenum">
               <a:rPr lang="en-US" smtClean="0"/>
               <a:t>‹#›</a:t>
             </a:fld>
@@ -1205,7 +1205,7 @@
     </p:spTree>
     <p:extLst>
       <p:ext uri="{BB962C8B-B14F-4D97-AF65-F5344CB8AC3E}">
-        <p14:creationId xmlns:p14="http://schemas.microsoft.com/office/powerpoint/2010/main" val="2885168189"/>
+        <p14:creationId xmlns:p14="http://schemas.microsoft.com/office/powerpoint/2010/main" val="1370896191"/>
       </p:ext>
     </p:extLst>
   </p:cSld>
@@ -1237,7 +1237,7 @@
           <p:cNvPr id="2" name="Title 1">
             <a:extLst>
               <a:ext uri="{FF2B5EF4-FFF2-40B4-BE49-F238E27FC236}">
-                <a16:creationId xmlns:a16="http://schemas.microsoft.com/office/drawing/2014/main" id="{5746C9D0-66FA-C2C4-E6E0-2DF53582DBA2}"/>
+                <a16:creationId xmlns:a16="http://schemas.microsoft.com/office/drawing/2014/main" id="{4FFF6D16-2D18-9D24-A89D-1F6F10F0D5CA}"/>
               </a:ext>
             </a:extLst>
           </p:cNvPr>
@@ -1265,7 +1265,7 @@
           <p:cNvPr id="3" name="Content Placeholder 2">
             <a:extLst>
               <a:ext uri="{FF2B5EF4-FFF2-40B4-BE49-F238E27FC236}">
-                <a16:creationId xmlns:a16="http://schemas.microsoft.com/office/drawing/2014/main" id="{6480474B-D857-42AF-C55B-40303D465444}"/>
+                <a16:creationId xmlns:a16="http://schemas.microsoft.com/office/drawing/2014/main" id="{9BE33E9D-7015-C674-E6BF-596AC1CD6EB7}"/>
               </a:ext>
             </a:extLst>
           </p:cNvPr>
@@ -1327,7 +1327,7 @@
           <p:cNvPr id="4" name="Content Placeholder 3">
             <a:extLst>
               <a:ext uri="{FF2B5EF4-FFF2-40B4-BE49-F238E27FC236}">
-                <a16:creationId xmlns:a16="http://schemas.microsoft.com/office/drawing/2014/main" id="{9ED81BBC-0C4B-F8E8-D72B-582966366EAD}"/>
+                <a16:creationId xmlns:a16="http://schemas.microsoft.com/office/drawing/2014/main" id="{C15E42A0-4881-A8F2-CD56-866F23DED7AA}"/>
               </a:ext>
             </a:extLst>
           </p:cNvPr>
@@ -1389,7 +1389,7 @@
           <p:cNvPr id="5" name="Date Placeholder 4">
             <a:extLst>
               <a:ext uri="{FF2B5EF4-FFF2-40B4-BE49-F238E27FC236}">
-                <a16:creationId xmlns:a16="http://schemas.microsoft.com/office/drawing/2014/main" id="{CD0F2279-5C71-8C21-3D0A-58C88DB4D153}"/>
+                <a16:creationId xmlns:a16="http://schemas.microsoft.com/office/drawing/2014/main" id="{0D98FC3B-D9C4-CFF0-5E2A-E64822043D9C}"/>
               </a:ext>
             </a:extLst>
           </p:cNvPr>
@@ -1405,9 +1405,9 @@
           <a:bodyPr/>
           <a:lstStyle/>
           <a:p>
-            <a:fld id="{A4317AF8-0AC5-4DAB-803D-4A0C4E3E6E10}" type="datetimeFigureOut">
+            <a:fld id="{05370C1C-FED6-47AC-B551-0F781BC50403}" type="datetimeFigureOut">
               <a:rPr lang="en-US" smtClean="0"/>
-              <a:t>10/21/2026</a:t>
+              <a:t>10/22/2026</a:t>
             </a:fld>
             <a:endParaRPr lang="en-US"/>
           </a:p>
@@ -1418,7 +1418,7 @@
           <p:cNvPr id="6" name="Footer Placeholder 5">
             <a:extLst>
               <a:ext uri="{FF2B5EF4-FFF2-40B4-BE49-F238E27FC236}">
-                <a16:creationId xmlns:a16="http://schemas.microsoft.com/office/drawing/2014/main" id="{802AE902-2790-7A7E-BC09-38E01537EEA0}"/>
+                <a16:creationId xmlns:a16="http://schemas.microsoft.com/office/drawing/2014/main" id="{246FC42D-1A6F-A658-E7E5-60CE86ACE787}"/>
               </a:ext>
             </a:extLst>
           </p:cNvPr>
@@ -1443,7 +1443,7 @@
           <p:cNvPr id="7" name="Slide Number Placeholder 6">
             <a:extLst>
               <a:ext uri="{FF2B5EF4-FFF2-40B4-BE49-F238E27FC236}">
-                <a16:creationId xmlns:a16="http://schemas.microsoft.com/office/drawing/2014/main" id="{3D6834DB-AA31-AD02-E590-F84F9158FD73}"/>
+                <a16:creationId xmlns:a16="http://schemas.microsoft.com/office/drawing/2014/main" id="{DDFB1ADE-9B9C-F379-8D2D-3987859EF7C0}"/>
               </a:ext>
             </a:extLst>
           </p:cNvPr>
@@ -1459,7 +1459,7 @@
           <a:bodyPr/>
           <a:lstStyle/>
           <a:p>
-            <a:fld id="{5A6A93B6-5A97-4D4C-82E0-3C56D8FAE5F5}" type="slidenum">
+            <a:fld id="{39980B17-6112-4913-98A3-F2E9B2E28D71}" type="slidenum">
               <a:rPr lang="en-US" smtClean="0"/>
               <a:t>‹#›</a:t>
             </a:fld>
@@ -1470,7 +1470,7 @@
     </p:spTree>
     <p:extLst>
       <p:ext uri="{BB962C8B-B14F-4D97-AF65-F5344CB8AC3E}">
-        <p14:creationId xmlns:p14="http://schemas.microsoft.com/office/powerpoint/2010/main" val="3169697962"/>
+        <p14:creationId xmlns:p14="http://schemas.microsoft.com/office/powerpoint/2010/main" val="2350525381"/>
       </p:ext>
     </p:extLst>
   </p:cSld>
@@ -1502,7 +1502,7 @@
           <p:cNvPr id="2" name="Title 1">
             <a:extLst>
               <a:ext uri="{FF2B5EF4-FFF2-40B4-BE49-F238E27FC236}">
-                <a16:creationId xmlns:a16="http://schemas.microsoft.com/office/drawing/2014/main" id="{5B752A8B-338F-21A2-7DFE-CC7D64896FAF}"/>
+                <a16:creationId xmlns:a16="http://schemas.microsoft.com/office/drawing/2014/main" id="{7642B64F-66D0-0966-C191-106EED2E1F8E}"/>
               </a:ext>
             </a:extLst>
           </p:cNvPr>
@@ -1535,7 +1535,7 @@
           <p:cNvPr id="3" name="Text Placeholder 2">
             <a:extLst>
               <a:ext uri="{FF2B5EF4-FFF2-40B4-BE49-F238E27FC236}">
-                <a16:creationId xmlns:a16="http://schemas.microsoft.com/office/drawing/2014/main" id="{69940D70-82D7-36C5-A1F1-36523C7134A1}"/>
+                <a16:creationId xmlns:a16="http://schemas.microsoft.com/office/drawing/2014/main" id="{80764FCE-C292-C6FC-3A86-D667E78DB4F3}"/>
               </a:ext>
             </a:extLst>
           </p:cNvPr>
@@ -1606,7 +1606,7 @@
           <p:cNvPr id="4" name="Content Placeholder 3">
             <a:extLst>
               <a:ext uri="{FF2B5EF4-FFF2-40B4-BE49-F238E27FC236}">
-                <a16:creationId xmlns:a16="http://schemas.microsoft.com/office/drawing/2014/main" id="{383D0562-58D0-4DB5-8928-1D43DD3EDDA0}"/>
+                <a16:creationId xmlns:a16="http://schemas.microsoft.com/office/drawing/2014/main" id="{6534DE03-826E-4035-7589-0F395B3C9A4C}"/>
               </a:ext>
             </a:extLst>
           </p:cNvPr>
@@ -1668,7 +1668,7 @@
           <p:cNvPr id="5" name="Text Placeholder 4">
             <a:extLst>
               <a:ext uri="{FF2B5EF4-FFF2-40B4-BE49-F238E27FC236}">
-                <a16:creationId xmlns:a16="http://schemas.microsoft.com/office/drawing/2014/main" id="{A1C5B0C3-FAAF-56F9-D2ED-4C75491068B5}"/>
+                <a16:creationId xmlns:a16="http://schemas.microsoft.com/office/drawing/2014/main" id="{0A48EA48-B1AC-6E4D-0B61-1A9734706FE2}"/>
               </a:ext>
             </a:extLst>
           </p:cNvPr>
@@ -1739,7 +1739,7 @@
           <p:cNvPr id="6" name="Content Placeholder 5">
             <a:extLst>
               <a:ext uri="{FF2B5EF4-FFF2-40B4-BE49-F238E27FC236}">
-                <a16:creationId xmlns:a16="http://schemas.microsoft.com/office/drawing/2014/main" id="{62FA88FD-BC51-2DA1-6E05-B7A93D49CB80}"/>
+                <a16:creationId xmlns:a16="http://schemas.microsoft.com/office/drawing/2014/main" id="{34DEA5C7-62C7-ED54-3FE4-C803F89D5AE6}"/>
               </a:ext>
             </a:extLst>
           </p:cNvPr>
@@ -1801,7 +1801,7 @@
           <p:cNvPr id="7" name="Date Placeholder 6">
             <a:extLst>
               <a:ext uri="{FF2B5EF4-FFF2-40B4-BE49-F238E27FC236}">
-                <a16:creationId xmlns:a16="http://schemas.microsoft.com/office/drawing/2014/main" id="{DA97BAA9-AC59-30E7-D807-9F1FA27F3C2F}"/>
+                <a16:creationId xmlns:a16="http://schemas.microsoft.com/office/drawing/2014/main" id="{F1A8CD6F-2887-3DBA-BD24-DE50BC55EF5B}"/>
               </a:ext>
             </a:extLst>
           </p:cNvPr>
@@ -1817,9 +1817,9 @@
           <a:bodyPr/>
           <a:lstStyle/>
           <a:p>
-            <a:fld id="{A4317AF8-0AC5-4DAB-803D-4A0C4E3E6E10}" type="datetimeFigureOut">
+            <a:fld id="{05370C1C-FED6-47AC-B551-0F781BC50403}" type="datetimeFigureOut">
               <a:rPr lang="en-US" smtClean="0"/>
-              <a:t>10/21/2026</a:t>
+              <a:t>10/22/2026</a:t>
             </a:fld>
             <a:endParaRPr lang="en-US"/>
           </a:p>
@@ -1830,7 +1830,7 @@
           <p:cNvPr id="8" name="Footer Placeholder 7">
             <a:extLst>
               <a:ext uri="{FF2B5EF4-FFF2-40B4-BE49-F238E27FC236}">
-                <a16:creationId xmlns:a16="http://schemas.microsoft.com/office/drawing/2014/main" id="{60229053-483A-B1AB-077E-D44F9F56E212}"/>
+                <a16:creationId xmlns:a16="http://schemas.microsoft.com/office/drawing/2014/main" id="{76BD1754-3FA4-0079-DB38-4823ECFFC69E}"/>
               </a:ext>
             </a:extLst>
           </p:cNvPr>
@@ -1855,7 +1855,7 @@
           <p:cNvPr id="9" name="Slide Number Placeholder 8">
             <a:extLst>
               <a:ext uri="{FF2B5EF4-FFF2-40B4-BE49-F238E27FC236}">
-                <a16:creationId xmlns:a16="http://schemas.microsoft.com/office/drawing/2014/main" id="{B828414F-AC6E-B4EB-1310-C0C4CB0BFBFC}"/>
+                <a16:creationId xmlns:a16="http://schemas.microsoft.com/office/drawing/2014/main" id="{305B1D62-D3FC-83A0-32F7-DB47C4CA238C}"/>
               </a:ext>
             </a:extLst>
           </p:cNvPr>
@@ -1871,7 +1871,7 @@
           <a:bodyPr/>
           <a:lstStyle/>
           <a:p>
-            <a:fld id="{5A6A93B6-5A97-4D4C-82E0-3C56D8FAE5F5}" type="slidenum">
+            <a:fld id="{39980B17-6112-4913-98A3-F2E9B2E28D71}" type="slidenum">
               <a:rPr lang="en-US" smtClean="0"/>
               <a:t>‹#›</a:t>
             </a:fld>
@@ -1882,7 +1882,7 @@
     </p:spTree>
     <p:extLst>
       <p:ext uri="{BB962C8B-B14F-4D97-AF65-F5344CB8AC3E}">
-        <p14:creationId xmlns:p14="http://schemas.microsoft.com/office/powerpoint/2010/main" val="276906685"/>
+        <p14:creationId xmlns:p14="http://schemas.microsoft.com/office/powerpoint/2010/main" val="3575000548"/>
       </p:ext>
     </p:extLst>
   </p:cSld>
@@ -1914,7 +1914,7 @@
           <p:cNvPr id="2" name="Title 1">
             <a:extLst>
               <a:ext uri="{FF2B5EF4-FFF2-40B4-BE49-F238E27FC236}">
-                <a16:creationId xmlns:a16="http://schemas.microsoft.com/office/drawing/2014/main" id="{77B31C86-8EFA-F47F-D61D-0CF7D847D816}"/>
+                <a16:creationId xmlns:a16="http://schemas.microsoft.com/office/drawing/2014/main" id="{46FE4828-6742-9AAA-7D91-7C5A2238726E}"/>
               </a:ext>
             </a:extLst>
           </p:cNvPr>
@@ -1942,7 +1942,7 @@
           <p:cNvPr id="3" name="Date Placeholder 2">
             <a:extLst>
               <a:ext uri="{FF2B5EF4-FFF2-40B4-BE49-F238E27FC236}">
-                <a16:creationId xmlns:a16="http://schemas.microsoft.com/office/drawing/2014/main" id="{82E0E2D4-186A-EF37-8FD9-223586BDEF12}"/>
+                <a16:creationId xmlns:a16="http://schemas.microsoft.com/office/drawing/2014/main" id="{201D966E-BAEE-A0BA-5381-80270C0CBB23}"/>
               </a:ext>
             </a:extLst>
           </p:cNvPr>
@@ -1958,9 +1958,9 @@
           <a:bodyPr/>
           <a:lstStyle/>
           <a:p>
-            <a:fld id="{A4317AF8-0AC5-4DAB-803D-4A0C4E3E6E10}" type="datetimeFigureOut">
+            <a:fld id="{05370C1C-FED6-47AC-B551-0F781BC50403}" type="datetimeFigureOut">
               <a:rPr lang="en-US" smtClean="0"/>
-              <a:t>10/21/2026</a:t>
+              <a:t>10/22/2026</a:t>
             </a:fld>
             <a:endParaRPr lang="en-US"/>
           </a:p>
@@ -1971,7 +1971,7 @@
           <p:cNvPr id="4" name="Footer Placeholder 3">
             <a:extLst>
               <a:ext uri="{FF2B5EF4-FFF2-40B4-BE49-F238E27FC236}">
-                <a16:creationId xmlns:a16="http://schemas.microsoft.com/office/drawing/2014/main" id="{263DCE21-1029-20F8-23B5-8C39EFB8919D}"/>
+                <a16:creationId xmlns:a16="http://schemas.microsoft.com/office/drawing/2014/main" id="{5562E9EF-A766-B4A0-9A68-1AF55E2A10AA}"/>
               </a:ext>
             </a:extLst>
           </p:cNvPr>
@@ -1996,7 +1996,7 @@
           <p:cNvPr id="5" name="Slide Number Placeholder 4">
             <a:extLst>
               <a:ext uri="{FF2B5EF4-FFF2-40B4-BE49-F238E27FC236}">
-                <a16:creationId xmlns:a16="http://schemas.microsoft.com/office/drawing/2014/main" id="{F8215234-CD57-2A6E-CFA1-D21BD1092000}"/>
+                <a16:creationId xmlns:a16="http://schemas.microsoft.com/office/drawing/2014/main" id="{C273A308-F2B6-E5B8-6E35-DFBC86607A3B}"/>
               </a:ext>
             </a:extLst>
           </p:cNvPr>
@@ -2012,7 +2012,7 @@
           <a:bodyPr/>
           <a:lstStyle/>
           <a:p>
-            <a:fld id="{5A6A93B6-5A97-4D4C-82E0-3C56D8FAE5F5}" type="slidenum">
+            <a:fld id="{39980B17-6112-4913-98A3-F2E9B2E28D71}" type="slidenum">
               <a:rPr lang="en-US" smtClean="0"/>
               <a:t>‹#›</a:t>
             </a:fld>
@@ -2023,7 +2023,7 @@
     </p:spTree>
     <p:extLst>
       <p:ext uri="{BB962C8B-B14F-4D97-AF65-F5344CB8AC3E}">
-        <p14:creationId xmlns:p14="http://schemas.microsoft.com/office/powerpoint/2010/main" val="159148038"/>
+        <p14:creationId xmlns:p14="http://schemas.microsoft.com/office/powerpoint/2010/main" val="3174852740"/>
       </p:ext>
     </p:extLst>
   </p:cSld>
@@ -2055,7 +2055,7 @@
           <p:cNvPr id="2" name="Date Placeholder 1">
             <a:extLst>
               <a:ext uri="{FF2B5EF4-FFF2-40B4-BE49-F238E27FC236}">
-                <a16:creationId xmlns:a16="http://schemas.microsoft.com/office/drawing/2014/main" id="{C4403B55-72EE-2216-37A3-CD9CD683855A}"/>
+                <a16:creationId xmlns:a16="http://schemas.microsoft.com/office/drawing/2014/main" id="{599D0D79-33C9-D8F5-F472-F0E57A07388D}"/>
               </a:ext>
             </a:extLst>
           </p:cNvPr>
@@ -2071,9 +2071,9 @@
           <a:bodyPr/>
           <a:lstStyle/>
           <a:p>
-            <a:fld id="{A4317AF8-0AC5-4DAB-803D-4A0C4E3E6E10}" type="datetimeFigureOut">
+            <a:fld id="{05370C1C-FED6-47AC-B551-0F781BC50403}" type="datetimeFigureOut">
               <a:rPr lang="en-US" smtClean="0"/>
-              <a:t>10/21/2026</a:t>
+              <a:t>10/22/2026</a:t>
             </a:fld>
             <a:endParaRPr lang="en-US"/>
           </a:p>
@@ -2084,7 +2084,7 @@
           <p:cNvPr id="3" name="Footer Placeholder 2">
             <a:extLst>
               <a:ext uri="{FF2B5EF4-FFF2-40B4-BE49-F238E27FC236}">
-                <a16:creationId xmlns:a16="http://schemas.microsoft.com/office/drawing/2014/main" id="{3F0D74C7-2887-C3CF-E264-BFB2CD53A1B6}"/>
+                <a16:creationId xmlns:a16="http://schemas.microsoft.com/office/drawing/2014/main" id="{EAC49751-F963-FBD1-33DC-33D1285296F9}"/>
               </a:ext>
             </a:extLst>
           </p:cNvPr>
@@ -2109,7 +2109,7 @@
           <p:cNvPr id="4" name="Slide Number Placeholder 3">
             <a:extLst>
               <a:ext uri="{FF2B5EF4-FFF2-40B4-BE49-F238E27FC236}">
-                <a16:creationId xmlns:a16="http://schemas.microsoft.com/office/drawing/2014/main" id="{6F4B55CD-D85D-36B9-C71E-95AD85CF7B83}"/>
+                <a16:creationId xmlns:a16="http://schemas.microsoft.com/office/drawing/2014/main" id="{9C6C7F41-3D9C-AFBB-D4C9-5A87CA06D634}"/>
               </a:ext>
             </a:extLst>
           </p:cNvPr>
@@ -2125,7 +2125,7 @@
           <a:bodyPr/>
           <a:lstStyle/>
           <a:p>
-            <a:fld id="{5A6A93B6-5A97-4D4C-82E0-3C56D8FAE5F5}" type="slidenum">
+            <a:fld id="{39980B17-6112-4913-98A3-F2E9B2E28D71}" type="slidenum">
               <a:rPr lang="en-US" smtClean="0"/>
               <a:t>‹#›</a:t>
             </a:fld>
@@ -2136,7 +2136,7 @@
     </p:spTree>
     <p:extLst>
       <p:ext uri="{BB962C8B-B14F-4D97-AF65-F5344CB8AC3E}">
-        <p14:creationId xmlns:p14="http://schemas.microsoft.com/office/powerpoint/2010/main" val="3210277895"/>
+        <p14:creationId xmlns:p14="http://schemas.microsoft.com/office/powerpoint/2010/main" val="344687232"/>
       </p:ext>
     </p:extLst>
   </p:cSld>
@@ -2168,7 +2168,7 @@
           <p:cNvPr id="2" name="Title 1">
             <a:extLst>
               <a:ext uri="{FF2B5EF4-FFF2-40B4-BE49-F238E27FC236}">
-                <a16:creationId xmlns:a16="http://schemas.microsoft.com/office/drawing/2014/main" id="{9B73AF12-E956-4879-ABCB-969AE2A87AE2}"/>
+                <a16:creationId xmlns:a16="http://schemas.microsoft.com/office/drawing/2014/main" id="{F79F9396-02AB-1D23-3E58-E0B6E79C01AF}"/>
               </a:ext>
             </a:extLst>
           </p:cNvPr>
@@ -2205,7 +2205,7 @@
           <p:cNvPr id="3" name="Content Placeholder 2">
             <a:extLst>
               <a:ext uri="{FF2B5EF4-FFF2-40B4-BE49-F238E27FC236}">
-                <a16:creationId xmlns:a16="http://schemas.microsoft.com/office/drawing/2014/main" id="{C8F44B8C-8F1F-961E-6E7F-96099ADD5E5C}"/>
+                <a16:creationId xmlns:a16="http://schemas.microsoft.com/office/drawing/2014/main" id="{9DB37EBD-F959-FB71-0719-101189D0B630}"/>
               </a:ext>
             </a:extLst>
           </p:cNvPr>
@@ -2295,7 +2295,7 @@
           <p:cNvPr id="4" name="Text Placeholder 3">
             <a:extLst>
               <a:ext uri="{FF2B5EF4-FFF2-40B4-BE49-F238E27FC236}">
-                <a16:creationId xmlns:a16="http://schemas.microsoft.com/office/drawing/2014/main" id="{1405CD19-9E88-AE0E-6B1B-88A96F49AA7A}"/>
+                <a16:creationId xmlns:a16="http://schemas.microsoft.com/office/drawing/2014/main" id="{EE6EF087-AD1F-E85B-27EF-614CC8665288}"/>
               </a:ext>
             </a:extLst>
           </p:cNvPr>
@@ -2366,7 +2366,7 @@
           <p:cNvPr id="5" name="Date Placeholder 4">
             <a:extLst>
               <a:ext uri="{FF2B5EF4-FFF2-40B4-BE49-F238E27FC236}">
-                <a16:creationId xmlns:a16="http://schemas.microsoft.com/office/drawing/2014/main" id="{59A7FE1B-7A11-E6D6-3972-C6B7906CCE0A}"/>
+                <a16:creationId xmlns:a16="http://schemas.microsoft.com/office/drawing/2014/main" id="{720F4AF9-9A01-EED3-28A2-36578E1A068C}"/>
               </a:ext>
             </a:extLst>
           </p:cNvPr>
@@ -2382,9 +2382,9 @@
           <a:bodyPr/>
           <a:lstStyle/>
           <a:p>
-            <a:fld id="{A4317AF8-0AC5-4DAB-803D-4A0C4E3E6E10}" type="datetimeFigureOut">
+            <a:fld id="{05370C1C-FED6-47AC-B551-0F781BC50403}" type="datetimeFigureOut">
               <a:rPr lang="en-US" smtClean="0"/>
-              <a:t>10/21/2026</a:t>
+              <a:t>10/22/2026</a:t>
             </a:fld>
             <a:endParaRPr lang="en-US"/>
           </a:p>
@@ -2395,7 +2395,7 @@
           <p:cNvPr id="6" name="Footer Placeholder 5">
             <a:extLst>
               <a:ext uri="{FF2B5EF4-FFF2-40B4-BE49-F238E27FC236}">
-                <a16:creationId xmlns:a16="http://schemas.microsoft.com/office/drawing/2014/main" id="{B3BBAA68-9DA1-BF84-0016-C2F8D95DD75E}"/>
+                <a16:creationId xmlns:a16="http://schemas.microsoft.com/office/drawing/2014/main" id="{603DA7FE-6911-46A0-37D2-79C1DBB82E9D}"/>
               </a:ext>
             </a:extLst>
           </p:cNvPr>
@@ -2420,7 +2420,7 @@
           <p:cNvPr id="7" name="Slide Number Placeholder 6">
             <a:extLst>
               <a:ext uri="{FF2B5EF4-FFF2-40B4-BE49-F238E27FC236}">
-                <a16:creationId xmlns:a16="http://schemas.microsoft.com/office/drawing/2014/main" id="{08A09551-0047-1006-3E55-8B8BF202F9BC}"/>
+                <a16:creationId xmlns:a16="http://schemas.microsoft.com/office/drawing/2014/main" id="{D5E3335D-B58D-BA62-7F3C-575B97ED4A50}"/>
               </a:ext>
             </a:extLst>
           </p:cNvPr>
@@ -2436,7 +2436,7 @@
           <a:bodyPr/>
           <a:lstStyle/>
           <a:p>
-            <a:fld id="{5A6A93B6-5A97-4D4C-82E0-3C56D8FAE5F5}" type="slidenum">
+            <a:fld id="{39980B17-6112-4913-98A3-F2E9B2E28D71}" type="slidenum">
               <a:rPr lang="en-US" smtClean="0"/>
               <a:t>‹#›</a:t>
             </a:fld>
@@ -2447,7 +2447,7 @@
     </p:spTree>
     <p:extLst>
       <p:ext uri="{BB962C8B-B14F-4D97-AF65-F5344CB8AC3E}">
-        <p14:creationId xmlns:p14="http://schemas.microsoft.com/office/powerpoint/2010/main" val="1114317918"/>
+        <p14:creationId xmlns:p14="http://schemas.microsoft.com/office/powerpoint/2010/main" val="1421331469"/>
       </p:ext>
     </p:extLst>
   </p:cSld>
@@ -2479,7 +2479,7 @@
           <p:cNvPr id="2" name="Title 1">
             <a:extLst>
               <a:ext uri="{FF2B5EF4-FFF2-40B4-BE49-F238E27FC236}">
-                <a16:creationId xmlns:a16="http://schemas.microsoft.com/office/drawing/2014/main" id="{244E8D35-993C-B176-8A52-1C6629FDA642}"/>
+                <a16:creationId xmlns:a16="http://schemas.microsoft.com/office/drawing/2014/main" id="{92D49F74-2A42-2DE3-263A-0AE050651C92}"/>
               </a:ext>
             </a:extLst>
           </p:cNvPr>
@@ -2516,7 +2516,7 @@
           <p:cNvPr id="3" name="Picture Placeholder 2">
             <a:extLst>
               <a:ext uri="{FF2B5EF4-FFF2-40B4-BE49-F238E27FC236}">
-                <a16:creationId xmlns:a16="http://schemas.microsoft.com/office/drawing/2014/main" id="{59C69CD9-EE91-518D-F93D-EA94D355A935}"/>
+                <a16:creationId xmlns:a16="http://schemas.microsoft.com/office/drawing/2014/main" id="{06BA4773-1043-C96D-0326-4065460EF872}"/>
               </a:ext>
             </a:extLst>
           </p:cNvPr>
@@ -2583,7 +2583,7 @@
           <p:cNvPr id="4" name="Text Placeholder 3">
             <a:extLst>
               <a:ext uri="{FF2B5EF4-FFF2-40B4-BE49-F238E27FC236}">
-                <a16:creationId xmlns:a16="http://schemas.microsoft.com/office/drawing/2014/main" id="{E2CB5692-4773-C167-6088-BB6E8333F61B}"/>
+                <a16:creationId xmlns:a16="http://schemas.microsoft.com/office/drawing/2014/main" id="{13FD9819-32EC-A8FD-6BD2-6F9FEA0F949F}"/>
               </a:ext>
             </a:extLst>
           </p:cNvPr>
@@ -2654,7 +2654,7 @@
           <p:cNvPr id="5" name="Date Placeholder 4">
             <a:extLst>
               <a:ext uri="{FF2B5EF4-FFF2-40B4-BE49-F238E27FC236}">
-                <a16:creationId xmlns:a16="http://schemas.microsoft.com/office/drawing/2014/main" id="{BC621462-A491-687A-C6CD-2034F8420B14}"/>
+                <a16:creationId xmlns:a16="http://schemas.microsoft.com/office/drawing/2014/main" id="{A71A347C-4DE5-8849-2240-E131D19E2422}"/>
               </a:ext>
             </a:extLst>
           </p:cNvPr>
@@ -2670,9 +2670,9 @@
           <a:bodyPr/>
           <a:lstStyle/>
           <a:p>
-            <a:fld id="{A4317AF8-0AC5-4DAB-803D-4A0C4E3E6E10}" type="datetimeFigureOut">
+            <a:fld id="{05370C1C-FED6-47AC-B551-0F781BC50403}" type="datetimeFigureOut">
               <a:rPr lang="en-US" smtClean="0"/>
-              <a:t>10/21/2026</a:t>
+              <a:t>10/22/2026</a:t>
             </a:fld>
             <a:endParaRPr lang="en-US"/>
           </a:p>
@@ -2683,7 +2683,7 @@
           <p:cNvPr id="6" name="Footer Placeholder 5">
             <a:extLst>
               <a:ext uri="{FF2B5EF4-FFF2-40B4-BE49-F238E27FC236}">
-                <a16:creationId xmlns:a16="http://schemas.microsoft.com/office/drawing/2014/main" id="{ABA50927-D75C-B35F-AD33-AB53926171EF}"/>
+                <a16:creationId xmlns:a16="http://schemas.microsoft.com/office/drawing/2014/main" id="{92F27E08-B77B-B4E3-450E-971EDEF4498D}"/>
               </a:ext>
             </a:extLst>
           </p:cNvPr>
@@ -2708,7 +2708,7 @@
           <p:cNvPr id="7" name="Slide Number Placeholder 6">
             <a:extLst>
               <a:ext uri="{FF2B5EF4-FFF2-40B4-BE49-F238E27FC236}">
-                <a16:creationId xmlns:a16="http://schemas.microsoft.com/office/drawing/2014/main" id="{77EEDF5C-DDAD-16AB-B207-B8BC8880AC73}"/>
+                <a16:creationId xmlns:a16="http://schemas.microsoft.com/office/drawing/2014/main" id="{30F928BD-A69D-DD94-DABB-00615F268006}"/>
               </a:ext>
             </a:extLst>
           </p:cNvPr>
@@ -2724,7 +2724,7 @@
           <a:bodyPr/>
           <a:lstStyle/>
           <a:p>
-            <a:fld id="{5A6A93B6-5A97-4D4C-82E0-3C56D8FAE5F5}" type="slidenum">
+            <a:fld id="{39980B17-6112-4913-98A3-F2E9B2E28D71}" type="slidenum">
               <a:rPr lang="en-US" smtClean="0"/>
               <a:t>‹#›</a:t>
             </a:fld>
@@ -2735,7 +2735,7 @@
     </p:spTree>
     <p:extLst>
       <p:ext uri="{BB962C8B-B14F-4D97-AF65-F5344CB8AC3E}">
-        <p14:creationId xmlns:p14="http://schemas.microsoft.com/office/powerpoint/2010/main" val="1667500118"/>
+        <p14:creationId xmlns:p14="http://schemas.microsoft.com/office/powerpoint/2010/main" val="2921984523"/>
       </p:ext>
     </p:extLst>
   </p:cSld>
@@ -2772,7 +2772,7 @@
           <p:cNvPr id="2" name="Title Placeholder 1">
             <a:extLst>
               <a:ext uri="{FF2B5EF4-FFF2-40B4-BE49-F238E27FC236}">
-                <a16:creationId xmlns:a16="http://schemas.microsoft.com/office/drawing/2014/main" id="{FFABAA40-BA99-8A42-90D2-934444ACFEDE}"/>
+                <a16:creationId xmlns:a16="http://schemas.microsoft.com/office/drawing/2014/main" id="{80DA8E6E-70BF-9400-1D45-BF066AC5B851}"/>
               </a:ext>
             </a:extLst>
           </p:cNvPr>
@@ -2810,7 +2810,7 @@
           <p:cNvPr id="3" name="Text Placeholder 2">
             <a:extLst>
               <a:ext uri="{FF2B5EF4-FFF2-40B4-BE49-F238E27FC236}">
-                <a16:creationId xmlns:a16="http://schemas.microsoft.com/office/drawing/2014/main" id="{75E6D11F-CEC2-0089-AC3C-E57A6E06276A}"/>
+                <a16:creationId xmlns:a16="http://schemas.microsoft.com/office/drawing/2014/main" id="{3832BCD4-21EE-E88B-F0C1-0EDD418B799B}"/>
               </a:ext>
             </a:extLst>
           </p:cNvPr>
@@ -2877,7 +2877,7 @@
           <p:cNvPr id="4" name="Date Placeholder 3">
             <a:extLst>
               <a:ext uri="{FF2B5EF4-FFF2-40B4-BE49-F238E27FC236}">
-                <a16:creationId xmlns:a16="http://schemas.microsoft.com/office/drawing/2014/main" id="{99715033-82B0-E3D2-AA1F-56D17E9BA866}"/>
+                <a16:creationId xmlns:a16="http://schemas.microsoft.com/office/drawing/2014/main" id="{63420107-3A5F-F53A-C7D3-D2485223EF15}"/>
               </a:ext>
             </a:extLst>
           </p:cNvPr>
@@ -2911,9 +2911,9 @@
             </a:lvl1pPr>
           </a:lstStyle>
           <a:p>
-            <a:fld id="{A4317AF8-0AC5-4DAB-803D-4A0C4E3E6E10}" type="datetimeFigureOut">
+            <a:fld id="{05370C1C-FED6-47AC-B551-0F781BC50403}" type="datetimeFigureOut">
               <a:rPr lang="en-US" smtClean="0"/>
-              <a:t>10/21/2026</a:t>
+              <a:t>10/22/2026</a:t>
             </a:fld>
             <a:endParaRPr lang="en-US"/>
           </a:p>
@@ -2924,7 +2924,7 @@
           <p:cNvPr id="5" name="Footer Placeholder 4">
             <a:extLst>
               <a:ext uri="{FF2B5EF4-FFF2-40B4-BE49-F238E27FC236}">
-                <a16:creationId xmlns:a16="http://schemas.microsoft.com/office/drawing/2014/main" id="{AC423342-AC84-B8A1-8B4E-A352D29B4A53}"/>
+                <a16:creationId xmlns:a16="http://schemas.microsoft.com/office/drawing/2014/main" id="{9F269BD3-71C7-D431-22C3-D7B9F2935A83}"/>
               </a:ext>
             </a:extLst>
           </p:cNvPr>
@@ -2967,7 +2967,7 @@
           <p:cNvPr id="6" name="Slide Number Placeholder 5">
             <a:extLst>
               <a:ext uri="{FF2B5EF4-FFF2-40B4-BE49-F238E27FC236}">
-                <a16:creationId xmlns:a16="http://schemas.microsoft.com/office/drawing/2014/main" id="{13C412DA-C13B-CAC1-173B-DE8C590931D3}"/>
+                <a16:creationId xmlns:a16="http://schemas.microsoft.com/office/drawing/2014/main" id="{263975A2-552C-2932-9AB7-C63694232B7E}"/>
               </a:ext>
             </a:extLst>
           </p:cNvPr>
@@ -3001,7 +3001,7 @@
             </a:lvl1pPr>
           </a:lstStyle>
           <a:p>
-            <a:fld id="{5A6A93B6-5A97-4D4C-82E0-3C56D8FAE5F5}" type="slidenum">
+            <a:fld id="{39980B17-6112-4913-98A3-F2E9B2E28D71}" type="slidenum">
               <a:rPr lang="en-US" smtClean="0"/>
               <a:t>‹#›</a:t>
             </a:fld>
@@ -3012,7 +3012,7 @@
     </p:spTree>
     <p:extLst>
       <p:ext uri="{BB962C8B-B14F-4D97-AF65-F5344CB8AC3E}">
-        <p14:creationId xmlns:p14="http://schemas.microsoft.com/office/powerpoint/2010/main" val="2527473293"/>
+        <p14:creationId xmlns:p14="http://schemas.microsoft.com/office/powerpoint/2010/main" val="697800654"/>
       </p:ext>
     </p:extLst>
   </p:cSld>
@@ -3335,7 +3335,7 @@
           <p:cNvPr id="2" name="Rectangle 1">
             <a:extLst>
               <a:ext uri="{FF2B5EF4-FFF2-40B4-BE49-F238E27FC236}">
-                <a16:creationId xmlns:a16="http://schemas.microsoft.com/office/drawing/2014/main" id="{0F65D0E8-3076-1937-B58D-E5A06EE938E2}"/>
+                <a16:creationId xmlns:a16="http://schemas.microsoft.com/office/drawing/2014/main" id="{A51D9A69-2A23-22CE-3F96-33DAF2A96277}"/>
               </a:ext>
             </a:extLst>
           </p:cNvPr>
@@ -3403,7 +3403,7 @@
           <p:cNvPr id="3" name="Rectangle 2">
             <a:extLst>
               <a:ext uri="{FF2B5EF4-FFF2-40B4-BE49-F238E27FC236}">
-                <a16:creationId xmlns:a16="http://schemas.microsoft.com/office/drawing/2014/main" id="{B469AFC7-BFA2-51A7-05CA-FB4FEEB0B148}"/>
+                <a16:creationId xmlns:a16="http://schemas.microsoft.com/office/drawing/2014/main" id="{F634AFFE-31AE-AD65-F61D-83633BEE837F}"/>
               </a:ext>
             </a:extLst>
           </p:cNvPr>
@@ -3471,7 +3471,7 @@
           <p:cNvPr id="4" name="TextBox 3">
             <a:extLst>
               <a:ext uri="{FF2B5EF4-FFF2-40B4-BE49-F238E27FC236}">
-                <a16:creationId xmlns:a16="http://schemas.microsoft.com/office/drawing/2014/main" id="{726D8044-FEE6-5BC1-CFBA-676CF27883A5}"/>
+                <a16:creationId xmlns:a16="http://schemas.microsoft.com/office/drawing/2014/main" id="{06FEA56D-2EA9-894D-0AED-B02CAEA5D09D}"/>
               </a:ext>
             </a:extLst>
           </p:cNvPr>
@@ -3511,7 +3511,7 @@
           <p:cNvPr id="5" name="TextBox 4">
             <a:extLst>
               <a:ext uri="{FF2B5EF4-FFF2-40B4-BE49-F238E27FC236}">
-                <a16:creationId xmlns:a16="http://schemas.microsoft.com/office/drawing/2014/main" id="{62BEAC58-43C7-9984-2AD8-E9E5AD3B0743}"/>
+                <a16:creationId xmlns:a16="http://schemas.microsoft.com/office/drawing/2014/main" id="{386B36DC-F76E-A1E7-0683-C696BB1F762A}"/>
               </a:ext>
             </a:extLst>
           </p:cNvPr>
@@ -3541,7 +3541,7 @@
                 </a:solidFill>
                 <a:latin typeface="Calibri" panose="020F0502020204030204" pitchFamily="34" charset="0"/>
               </a:rPr>
-              <a:t>EDIFACT purchase orders to JSON and XML, and back, with MuleSoft</a:t>
+              <a:t>EDIFACT purchase orders to JSON and XML, and back, over SFTP with MuleSoft</a:t>
             </a:r>
           </a:p>
         </p:txBody>
@@ -3551,7 +3551,7 @@
           <p:cNvPr id="6" name="TextBox 5">
             <a:extLst>
               <a:ext uri="{FF2B5EF4-FFF2-40B4-BE49-F238E27FC236}">
-                <a16:creationId xmlns:a16="http://schemas.microsoft.com/office/drawing/2014/main" id="{86A60B14-03D8-E666-767C-C89C0A6051BA}"/>
+                <a16:creationId xmlns:a16="http://schemas.microsoft.com/office/drawing/2014/main" id="{56E0E3A9-F6EF-EFF9-9258-B83C11D5CB82}"/>
               </a:ext>
             </a:extLst>
           </p:cNvPr>
@@ -3589,7 +3589,7 @@
     </p:spTree>
     <p:extLst>
       <p:ext uri="{BB962C8B-B14F-4D97-AF65-F5344CB8AC3E}">
-        <p14:creationId xmlns:p14="http://schemas.microsoft.com/office/powerpoint/2010/main" val="2023727431"/>
+        <p14:creationId xmlns:p14="http://schemas.microsoft.com/office/powerpoint/2010/main" val="2007732993"/>
       </p:ext>
     </p:extLst>
   </p:cSld>
@@ -3621,7 +3621,7 @@
           <p:cNvPr id="2" name="Rectangle 1">
             <a:extLst>
               <a:ext uri="{FF2B5EF4-FFF2-40B4-BE49-F238E27FC236}">
-                <a16:creationId xmlns:a16="http://schemas.microsoft.com/office/drawing/2014/main" id="{9CAEABB8-10E3-DD39-7639-F153A24F5523}"/>
+                <a16:creationId xmlns:a16="http://schemas.microsoft.com/office/drawing/2014/main" id="{BCEADDA7-9D9B-82FD-1238-D654624E57D0}"/>
               </a:ext>
             </a:extLst>
           </p:cNvPr>
@@ -3696,7 +3696,7 @@
           <p:cNvPr id="3" name="Rectangle 2">
             <a:extLst>
               <a:ext uri="{FF2B5EF4-FFF2-40B4-BE49-F238E27FC236}">
-                <a16:creationId xmlns:a16="http://schemas.microsoft.com/office/drawing/2014/main" id="{34949501-73AB-2746-8BA0-C09F37E3DED4}"/>
+                <a16:creationId xmlns:a16="http://schemas.microsoft.com/office/drawing/2014/main" id="{BA565DC0-F7D2-3378-670F-2FDD5D5B2B2F}"/>
               </a:ext>
             </a:extLst>
           </p:cNvPr>
@@ -3764,7 +3764,7 @@
           <p:cNvPr id="4" name="TextBox 3">
             <a:extLst>
               <a:ext uri="{FF2B5EF4-FFF2-40B4-BE49-F238E27FC236}">
-                <a16:creationId xmlns:a16="http://schemas.microsoft.com/office/drawing/2014/main" id="{3952D4BC-5C5F-E59E-A5F1-470440AA8AD5}"/>
+                <a16:creationId xmlns:a16="http://schemas.microsoft.com/office/drawing/2014/main" id="{2A534F04-3983-CC41-8BD1-BB68B23638C3}"/>
               </a:ext>
             </a:extLst>
           </p:cNvPr>
@@ -3804,7 +3804,7 @@
           <p:cNvPr id="5" name="TextBox 4">
             <a:extLst>
               <a:ext uri="{FF2B5EF4-FFF2-40B4-BE49-F238E27FC236}">
-                <a16:creationId xmlns:a16="http://schemas.microsoft.com/office/drawing/2014/main" id="{A98EB36E-81F9-DF42-2B34-643DD0612DE7}"/>
+                <a16:creationId xmlns:a16="http://schemas.microsoft.com/office/drawing/2014/main" id="{340D0B56-4E51-64D5-4C37-96AA87F99E53}"/>
               </a:ext>
             </a:extLst>
           </p:cNvPr>
@@ -3845,7 +3845,7 @@
           <p:cNvPr id="6" name="TextBox 5">
             <a:extLst>
               <a:ext uri="{FF2B5EF4-FFF2-40B4-BE49-F238E27FC236}">
-                <a16:creationId xmlns:a16="http://schemas.microsoft.com/office/drawing/2014/main" id="{B316ED74-D392-1D31-A7F5-9C77AA7D41F1}"/>
+                <a16:creationId xmlns:a16="http://schemas.microsoft.com/office/drawing/2014/main" id="{C8122614-1A5E-5984-AC03-BB062FF3A93E}"/>
               </a:ext>
             </a:extLst>
           </p:cNvPr>
@@ -3885,7 +3885,7 @@
           <p:cNvPr id="7" name="TextBox 6">
             <a:extLst>
               <a:ext uri="{FF2B5EF4-FFF2-40B4-BE49-F238E27FC236}">
-                <a16:creationId xmlns:a16="http://schemas.microsoft.com/office/drawing/2014/main" id="{0BD212B5-282D-4424-DB57-F84671A021DF}"/>
+                <a16:creationId xmlns:a16="http://schemas.microsoft.com/office/drawing/2014/main" id="{981C16CF-6950-DCFA-3060-43C6669873A8}"/>
               </a:ext>
             </a:extLst>
           </p:cNvPr>
@@ -3895,7 +3895,7 @@
         <p:spPr>
           <a:xfrm>
             <a:off x="635000" y="1778000"/>
-            <a:ext cx="5207000" cy="1446550"/>
+            <a:ext cx="5207000" cy="1708160"/>
           </a:xfrm>
           <a:prstGeom prst="rect">
             <a:avLst/>
@@ -3976,7 +3976,7 @@
                 </a:solidFill>
                 <a:latin typeface="Calibri" panose="020F0502020204030204" pitchFamily="34" charset="0"/>
               </a:rPr>
-              <a:t>Conversion to and from JSON and XML</a:t>
+              <a:t>JSON and XML on SFTP, and EDIFACT written for every outbound order</a:t>
             </a:r>
           </a:p>
         </p:txBody>
@@ -3986,7 +3986,7 @@
           <p:cNvPr id="8" name="TextBox 7">
             <a:extLst>
               <a:ext uri="{FF2B5EF4-FFF2-40B4-BE49-F238E27FC236}">
-                <a16:creationId xmlns:a16="http://schemas.microsoft.com/office/drawing/2014/main" id="{1B8F0323-F186-6586-0F33-A4E6E606852F}"/>
+                <a16:creationId xmlns:a16="http://schemas.microsoft.com/office/drawing/2014/main" id="{060EF29C-C7F4-E35B-B5D8-395FED33BF21}"/>
               </a:ext>
             </a:extLst>
           </p:cNvPr>
@@ -4026,7 +4026,7 @@
           <p:cNvPr id="9" name="TextBox 8">
             <a:extLst>
               <a:ext uri="{FF2B5EF4-FFF2-40B4-BE49-F238E27FC236}">
-                <a16:creationId xmlns:a16="http://schemas.microsoft.com/office/drawing/2014/main" id="{DAF84443-46CF-BCEF-58D1-3836884F0F58}"/>
+                <a16:creationId xmlns:a16="http://schemas.microsoft.com/office/drawing/2014/main" id="{B0F56BB3-90DE-CD96-A861-B050420267F5}"/>
               </a:ext>
             </a:extLst>
           </p:cNvPr>
@@ -4081,7 +4081,7 @@
                 </a:solidFill>
                 <a:latin typeface="Calibri" panose="020F0502020204030204" pitchFamily="34" charset="0"/>
               </a:rPr>
-              <a:t>Agree on transport: SFTP or AS2</a:t>
+              <a:t>Confirm the partner SFTP account and directories</a:t>
             </a:r>
           </a:p>
           <a:p>
@@ -4127,7 +4127,7 @@
           <p:cNvPr id="10" name="TextBox 9">
             <a:extLst>
               <a:ext uri="{FF2B5EF4-FFF2-40B4-BE49-F238E27FC236}">
-                <a16:creationId xmlns:a16="http://schemas.microsoft.com/office/drawing/2014/main" id="{1FB87373-9120-34BF-DA90-9846AF02EA5E}"/>
+                <a16:creationId xmlns:a16="http://schemas.microsoft.com/office/drawing/2014/main" id="{419AF972-6F31-5AB1-44B4-488D365DA94A}"/>
               </a:ext>
             </a:extLst>
           </p:cNvPr>
@@ -4166,7 +4166,7 @@
     </p:spTree>
     <p:extLst>
       <p:ext uri="{BB962C8B-B14F-4D97-AF65-F5344CB8AC3E}">
-        <p14:creationId xmlns:p14="http://schemas.microsoft.com/office/powerpoint/2010/main" val="1550081523"/>
+        <p14:creationId xmlns:p14="http://schemas.microsoft.com/office/powerpoint/2010/main" val="1535384605"/>
       </p:ext>
     </p:extLst>
   </p:cSld>
@@ -4198,7 +4198,7 @@
           <p:cNvPr id="2" name="Rectangle 1">
             <a:extLst>
               <a:ext uri="{FF2B5EF4-FFF2-40B4-BE49-F238E27FC236}">
-                <a16:creationId xmlns:a16="http://schemas.microsoft.com/office/drawing/2014/main" id="{B4DF5CBE-A0AC-7131-DCA6-F1CC7E7E4831}"/>
+                <a16:creationId xmlns:a16="http://schemas.microsoft.com/office/drawing/2014/main" id="{B20F47D9-FEE2-259B-EEDE-291C51998ECD}"/>
               </a:ext>
             </a:extLst>
           </p:cNvPr>
@@ -4273,7 +4273,7 @@
           <p:cNvPr id="3" name="Rectangle 2">
             <a:extLst>
               <a:ext uri="{FF2B5EF4-FFF2-40B4-BE49-F238E27FC236}">
-                <a16:creationId xmlns:a16="http://schemas.microsoft.com/office/drawing/2014/main" id="{293A9E04-BA57-220F-3839-8182B14B0226}"/>
+                <a16:creationId xmlns:a16="http://schemas.microsoft.com/office/drawing/2014/main" id="{ADC25A60-7E85-F75B-897B-09601AEA3325}"/>
               </a:ext>
             </a:extLst>
           </p:cNvPr>
@@ -4341,7 +4341,7 @@
           <p:cNvPr id="4" name="TextBox 3">
             <a:extLst>
               <a:ext uri="{FF2B5EF4-FFF2-40B4-BE49-F238E27FC236}">
-                <a16:creationId xmlns:a16="http://schemas.microsoft.com/office/drawing/2014/main" id="{124719D8-48B0-D087-6E24-7E74A7B6CC86}"/>
+                <a16:creationId xmlns:a16="http://schemas.microsoft.com/office/drawing/2014/main" id="{E4626C0C-FA3E-3770-BE99-A1D473C81DEA}"/>
               </a:ext>
             </a:extLst>
           </p:cNvPr>
@@ -4381,7 +4381,7 @@
           <p:cNvPr id="5" name="TextBox 4">
             <a:extLst>
               <a:ext uri="{FF2B5EF4-FFF2-40B4-BE49-F238E27FC236}">
-                <a16:creationId xmlns:a16="http://schemas.microsoft.com/office/drawing/2014/main" id="{6A6D3B91-BFE7-36F9-A7E9-631AE192E1D5}"/>
+                <a16:creationId xmlns:a16="http://schemas.microsoft.com/office/drawing/2014/main" id="{506A54C2-60C5-CB5E-A7F4-5F6AD9F5DEF4}"/>
               </a:ext>
             </a:extLst>
           </p:cNvPr>
@@ -4422,7 +4422,7 @@
           <p:cNvPr id="6" name="TextBox 5">
             <a:extLst>
               <a:ext uri="{FF2B5EF4-FFF2-40B4-BE49-F238E27FC236}">
-                <a16:creationId xmlns:a16="http://schemas.microsoft.com/office/drawing/2014/main" id="{9BE30E5B-3F33-13A7-9A99-112738AB0E51}"/>
+                <a16:creationId xmlns:a16="http://schemas.microsoft.com/office/drawing/2014/main" id="{00FE5643-E457-4FC3-33A4-8F9C1A020A0A}"/>
               </a:ext>
             </a:extLst>
           </p:cNvPr>
@@ -4462,7 +4462,7 @@
           <p:cNvPr id="7" name="TextBox 6">
             <a:extLst>
               <a:ext uri="{FF2B5EF4-FFF2-40B4-BE49-F238E27FC236}">
-                <a16:creationId xmlns:a16="http://schemas.microsoft.com/office/drawing/2014/main" id="{564DCD1E-690A-F02B-52AD-05B49DE1E410}"/>
+                <a16:creationId xmlns:a16="http://schemas.microsoft.com/office/drawing/2014/main" id="{BD08259A-0070-99C6-4BF4-A05028345D62}"/>
               </a:ext>
             </a:extLst>
           </p:cNvPr>
@@ -4499,7 +4499,7 @@
                 </a:solidFill>
                 <a:latin typeface="Calibri" panose="020F0502020204030204" pitchFamily="34" charset="0"/>
               </a:rPr>
-              <a:t>Receive each purchase order and validate it against the EDIFACT standard.</a:t>
+              <a:t>Receive each purchase order from SFTP and validate it against the EDIFACT standard.</a:t>
             </a:r>
           </a:p>
           <a:p>
@@ -4553,7 +4553,7 @@
                 </a:solidFill>
                 <a:latin typeface="Calibri" panose="020F0502020204030204" pitchFamily="34" charset="0"/>
               </a:rPr>
-              <a:t>Provide the order as JSON and XML.</a:t>
+              <a:t>Write the order to SFTP as both JSON and XML.</a:t>
             </a:r>
           </a:p>
           <a:p>
@@ -4571,7 +4571,7 @@
                 </a:solidFill>
                 <a:latin typeface="Calibri" panose="020F0502020204030204" pitchFamily="34" charset="0"/>
               </a:rPr>
-              <a:t>Send accepted orders back out as EDIFACT when required.</a:t>
+              <a:t>Write every outbound order back to SFTP as EDIFACT, including a rejected order.</a:t>
             </a:r>
           </a:p>
         </p:txBody>
@@ -4581,7 +4581,7 @@
           <p:cNvPr id="8" name="Rectangle: Rounded Corners 7">
             <a:extLst>
               <a:ext uri="{FF2B5EF4-FFF2-40B4-BE49-F238E27FC236}">
-                <a16:creationId xmlns:a16="http://schemas.microsoft.com/office/drawing/2014/main" id="{74579DB7-CC47-0E12-CAFA-7687F1ABCFAE}"/>
+                <a16:creationId xmlns:a16="http://schemas.microsoft.com/office/drawing/2014/main" id="{39FAE2F0-B8B1-2641-58BB-04FB4CB7C047}"/>
               </a:ext>
             </a:extLst>
           </p:cNvPr>
@@ -4657,7 +4657,7 @@
           <p:cNvPr id="9" name="Rectangle: Rounded Corners 8">
             <a:extLst>
               <a:ext uri="{FF2B5EF4-FFF2-40B4-BE49-F238E27FC236}">
-                <a16:creationId xmlns:a16="http://schemas.microsoft.com/office/drawing/2014/main" id="{CD0A59DF-1AA7-D809-0801-17640B8CB49C}"/>
+                <a16:creationId xmlns:a16="http://schemas.microsoft.com/office/drawing/2014/main" id="{E3ABD669-F74E-6989-7491-2BBC3CDA1ABE}"/>
               </a:ext>
             </a:extLst>
           </p:cNvPr>
@@ -4733,7 +4733,7 @@
           <p:cNvPr id="10" name="Rectangle: Rounded Corners 9">
             <a:extLst>
               <a:ext uri="{FF2B5EF4-FFF2-40B4-BE49-F238E27FC236}">
-                <a16:creationId xmlns:a16="http://schemas.microsoft.com/office/drawing/2014/main" id="{57CD7FE9-3F49-FA85-726E-EB3DABE1A8EE}"/>
+                <a16:creationId xmlns:a16="http://schemas.microsoft.com/office/drawing/2014/main" id="{20B2F8A7-F638-2AD5-71DD-5E532A789F4D}"/>
               </a:ext>
             </a:extLst>
           </p:cNvPr>
@@ -4809,7 +4809,7 @@
           <p:cNvPr id="11" name="Straight Connector 10">
             <a:extLst>
               <a:ext uri="{FF2B5EF4-FFF2-40B4-BE49-F238E27FC236}">
-                <a16:creationId xmlns:a16="http://schemas.microsoft.com/office/drawing/2014/main" id="{87C5EA13-D5E3-F4A8-38AB-BF22C259D124}"/>
+                <a16:creationId xmlns:a16="http://schemas.microsoft.com/office/drawing/2014/main" id="{DFDD254F-C3C5-376B-8CA2-63AD425DE536}"/>
               </a:ext>
             </a:extLst>
           </p:cNvPr>
@@ -4851,7 +4851,7 @@
           <p:cNvPr id="12" name="Straight Connector 11">
             <a:extLst>
               <a:ext uri="{FF2B5EF4-FFF2-40B4-BE49-F238E27FC236}">
-                <a16:creationId xmlns:a16="http://schemas.microsoft.com/office/drawing/2014/main" id="{086228F1-BDE1-CDD8-4B25-E6BABFD8E871}"/>
+                <a16:creationId xmlns:a16="http://schemas.microsoft.com/office/drawing/2014/main" id="{0D693F31-E29C-AA44-D232-045057E22C37}"/>
               </a:ext>
             </a:extLst>
           </p:cNvPr>
@@ -4893,7 +4893,7 @@
           <p:cNvPr id="13" name="TextBox 12">
             <a:extLst>
               <a:ext uri="{FF2B5EF4-FFF2-40B4-BE49-F238E27FC236}">
-                <a16:creationId xmlns:a16="http://schemas.microsoft.com/office/drawing/2014/main" id="{D7C5F3A7-79FF-6973-5FDC-DDC168649F20}"/>
+                <a16:creationId xmlns:a16="http://schemas.microsoft.com/office/drawing/2014/main" id="{E0B68313-38C1-CD8F-BF46-9AEB060D3779}"/>
               </a:ext>
             </a:extLst>
           </p:cNvPr>
@@ -4932,7 +4932,7 @@
     </p:spTree>
     <p:extLst>
       <p:ext uri="{BB962C8B-B14F-4D97-AF65-F5344CB8AC3E}">
-        <p14:creationId xmlns:p14="http://schemas.microsoft.com/office/powerpoint/2010/main" val="3372204737"/>
+        <p14:creationId xmlns:p14="http://schemas.microsoft.com/office/powerpoint/2010/main" val="446545157"/>
       </p:ext>
     </p:extLst>
   </p:cSld>
@@ -4964,7 +4964,7 @@
           <p:cNvPr id="2" name="Rectangle 1">
             <a:extLst>
               <a:ext uri="{FF2B5EF4-FFF2-40B4-BE49-F238E27FC236}">
-                <a16:creationId xmlns:a16="http://schemas.microsoft.com/office/drawing/2014/main" id="{9CC3168B-F249-48C9-F11A-86A2CC4107AD}"/>
+                <a16:creationId xmlns:a16="http://schemas.microsoft.com/office/drawing/2014/main" id="{E5680842-7199-AAD0-F049-F4918F24E0EF}"/>
               </a:ext>
             </a:extLst>
           </p:cNvPr>
@@ -5039,7 +5039,7 @@
           <p:cNvPr id="3" name="Rectangle 2">
             <a:extLst>
               <a:ext uri="{FF2B5EF4-FFF2-40B4-BE49-F238E27FC236}">
-                <a16:creationId xmlns:a16="http://schemas.microsoft.com/office/drawing/2014/main" id="{F7651864-8AD0-912E-F80F-6A241D752CBE}"/>
+                <a16:creationId xmlns:a16="http://schemas.microsoft.com/office/drawing/2014/main" id="{F932762E-04C1-CA8B-D85F-EBCD70C01999}"/>
               </a:ext>
             </a:extLst>
           </p:cNvPr>
@@ -5107,7 +5107,7 @@
           <p:cNvPr id="4" name="TextBox 3">
             <a:extLst>
               <a:ext uri="{FF2B5EF4-FFF2-40B4-BE49-F238E27FC236}">
-                <a16:creationId xmlns:a16="http://schemas.microsoft.com/office/drawing/2014/main" id="{9EFF719B-4F43-C1DB-AC69-58105D7200BC}"/>
+                <a16:creationId xmlns:a16="http://schemas.microsoft.com/office/drawing/2014/main" id="{0A6C7481-C282-23AD-418D-AD667DCDF9D8}"/>
               </a:ext>
             </a:extLst>
           </p:cNvPr>
@@ -5147,7 +5147,7 @@
           <p:cNvPr id="5" name="TextBox 4">
             <a:extLst>
               <a:ext uri="{FF2B5EF4-FFF2-40B4-BE49-F238E27FC236}">
-                <a16:creationId xmlns:a16="http://schemas.microsoft.com/office/drawing/2014/main" id="{53C64A77-D52C-59FD-DA3E-8AE99148288F}"/>
+                <a16:creationId xmlns:a16="http://schemas.microsoft.com/office/drawing/2014/main" id="{2846682C-ED70-263D-1EFF-D4BE434CCBA3}"/>
               </a:ext>
             </a:extLst>
           </p:cNvPr>
@@ -5188,7 +5188,7 @@
           <p:cNvPr id="6" name="Oval 5">
             <a:extLst>
               <a:ext uri="{FF2B5EF4-FFF2-40B4-BE49-F238E27FC236}">
-                <a16:creationId xmlns:a16="http://schemas.microsoft.com/office/drawing/2014/main" id="{0BFD4363-46B4-D952-E57D-77B3888623AF}"/>
+                <a16:creationId xmlns:a16="http://schemas.microsoft.com/office/drawing/2014/main" id="{A1531AF3-A3E0-5AD6-8C56-8420663F71EA}"/>
               </a:ext>
             </a:extLst>
           </p:cNvPr>
@@ -5264,7 +5264,7 @@
           <p:cNvPr id="7" name="Rectangle 6">
             <a:extLst>
               <a:ext uri="{FF2B5EF4-FFF2-40B4-BE49-F238E27FC236}">
-                <a16:creationId xmlns:a16="http://schemas.microsoft.com/office/drawing/2014/main" id="{197515C7-4A95-4C47-9EDB-1023351378F9}"/>
+                <a16:creationId xmlns:a16="http://schemas.microsoft.com/office/drawing/2014/main" id="{DE024042-274A-E30F-AD98-8817F9F4E74B}"/>
               </a:ext>
             </a:extLst>
           </p:cNvPr>
@@ -5331,7 +5331,7 @@
                 </a:solidFill>
                 <a:latin typeface="Calibri" panose="020F0502020204030204" pitchFamily="34" charset="0"/>
               </a:rPr>
-              <a:t>Read EDIFACT ORDERS D.96A with the MuleSoft EDIFACT EDI Connector.</a:t>
+              <a:t>Read EDIFACT ORDERS D.96A from the SFTP edi directory with the MuleSoft EDIFACT EDI Connector.</a:t>
             </a:r>
           </a:p>
         </p:txBody>
@@ -5341,7 +5341,7 @@
           <p:cNvPr id="8" name="Rectangle 7">
             <a:extLst>
               <a:ext uri="{FF2B5EF4-FFF2-40B4-BE49-F238E27FC236}">
-                <a16:creationId xmlns:a16="http://schemas.microsoft.com/office/drawing/2014/main" id="{5A187762-1FD0-F159-E5C9-04A8D0738CA1}"/>
+                <a16:creationId xmlns:a16="http://schemas.microsoft.com/office/drawing/2014/main" id="{72C43EE0-53B4-D93E-A380-737B54465CD5}"/>
               </a:ext>
             </a:extLst>
           </p:cNvPr>
@@ -5409,7 +5409,7 @@
           <p:cNvPr id="9" name="Oval 8">
             <a:extLst>
               <a:ext uri="{FF2B5EF4-FFF2-40B4-BE49-F238E27FC236}">
-                <a16:creationId xmlns:a16="http://schemas.microsoft.com/office/drawing/2014/main" id="{9E9F1985-C420-E9D6-F1D2-2C4A7D7D15B6}"/>
+                <a16:creationId xmlns:a16="http://schemas.microsoft.com/office/drawing/2014/main" id="{3AC33F43-2B5F-34A9-7862-05D7A5DC794F}"/>
               </a:ext>
             </a:extLst>
           </p:cNvPr>
@@ -5485,7 +5485,7 @@
           <p:cNvPr id="10" name="Rectangle 9">
             <a:extLst>
               <a:ext uri="{FF2B5EF4-FFF2-40B4-BE49-F238E27FC236}">
-                <a16:creationId xmlns:a16="http://schemas.microsoft.com/office/drawing/2014/main" id="{7ED06ABE-9C48-6B1A-93FD-3B1A861A4CFB}"/>
+                <a16:creationId xmlns:a16="http://schemas.microsoft.com/office/drawing/2014/main" id="{6BA16CF7-1A3F-6416-8B88-0C6B43C9D8AD}"/>
               </a:ext>
             </a:extLst>
           </p:cNvPr>
@@ -5562,7 +5562,7 @@
           <p:cNvPr id="11" name="Rectangle 10">
             <a:extLst>
               <a:ext uri="{FF2B5EF4-FFF2-40B4-BE49-F238E27FC236}">
-                <a16:creationId xmlns:a16="http://schemas.microsoft.com/office/drawing/2014/main" id="{63777E42-1B14-7100-4E49-3838EB281A28}"/>
+                <a16:creationId xmlns:a16="http://schemas.microsoft.com/office/drawing/2014/main" id="{65AEAD19-FADD-524C-6076-9700F394DCD1}"/>
               </a:ext>
             </a:extLst>
           </p:cNvPr>
@@ -5630,7 +5630,7 @@
           <p:cNvPr id="12" name="Oval 11">
             <a:extLst>
               <a:ext uri="{FF2B5EF4-FFF2-40B4-BE49-F238E27FC236}">
-                <a16:creationId xmlns:a16="http://schemas.microsoft.com/office/drawing/2014/main" id="{DAE445C9-6EBE-B6DC-DE15-C045FE657F26}"/>
+                <a16:creationId xmlns:a16="http://schemas.microsoft.com/office/drawing/2014/main" id="{B279F7AA-E244-035C-478A-615561858713}"/>
               </a:ext>
             </a:extLst>
           </p:cNvPr>
@@ -5706,7 +5706,7 @@
           <p:cNvPr id="13" name="Rectangle 12">
             <a:extLst>
               <a:ext uri="{FF2B5EF4-FFF2-40B4-BE49-F238E27FC236}">
-                <a16:creationId xmlns:a16="http://schemas.microsoft.com/office/drawing/2014/main" id="{35061D52-ECFC-F147-33F3-401AF3BFBE31}"/>
+                <a16:creationId xmlns:a16="http://schemas.microsoft.com/office/drawing/2014/main" id="{0E2DCBCA-A726-8455-6634-1F8A796DBECA}"/>
               </a:ext>
             </a:extLst>
           </p:cNvPr>
@@ -5783,7 +5783,7 @@
           <p:cNvPr id="14" name="Rectangle 13">
             <a:extLst>
               <a:ext uri="{FF2B5EF4-FFF2-40B4-BE49-F238E27FC236}">
-                <a16:creationId xmlns:a16="http://schemas.microsoft.com/office/drawing/2014/main" id="{CE4C9E57-2068-0D71-BDB3-E9783FDF98FB}"/>
+                <a16:creationId xmlns:a16="http://schemas.microsoft.com/office/drawing/2014/main" id="{B01A3A33-D871-7918-DD59-A0C7015AE5FF}"/>
               </a:ext>
             </a:extLst>
           </p:cNvPr>
@@ -5851,7 +5851,7 @@
           <p:cNvPr id="15" name="Oval 14">
             <a:extLst>
               <a:ext uri="{FF2B5EF4-FFF2-40B4-BE49-F238E27FC236}">
-                <a16:creationId xmlns:a16="http://schemas.microsoft.com/office/drawing/2014/main" id="{EC7D6F19-F76A-3CFF-3A8B-6DD8E245F892}"/>
+                <a16:creationId xmlns:a16="http://schemas.microsoft.com/office/drawing/2014/main" id="{870D17F6-B106-D739-C2DD-30978ADF97CB}"/>
               </a:ext>
             </a:extLst>
           </p:cNvPr>
@@ -5927,7 +5927,7 @@
           <p:cNvPr id="16" name="Rectangle 15">
             <a:extLst>
               <a:ext uri="{FF2B5EF4-FFF2-40B4-BE49-F238E27FC236}">
-                <a16:creationId xmlns:a16="http://schemas.microsoft.com/office/drawing/2014/main" id="{19D5F891-7C6D-6FAB-3667-B89BD1C91B83}"/>
+                <a16:creationId xmlns:a16="http://schemas.microsoft.com/office/drawing/2014/main" id="{5B28E906-292A-F068-FF0F-9C738C2822E8}"/>
               </a:ext>
             </a:extLst>
           </p:cNvPr>
@@ -5994,7 +5994,7 @@
                 </a:solidFill>
                 <a:latin typeface="Calibri" panose="020F0502020204030204" pitchFamily="34" charset="0"/>
               </a:rPr>
-              <a:t>Produce JSON and XML, and generate EDIFACT from JSON or XML.</a:t>
+              <a:t>Write JSON and XML to SFTP, and write EDIFACT for every outbound order.</a:t>
             </a:r>
           </a:p>
         </p:txBody>
@@ -6004,7 +6004,7 @@
           <p:cNvPr id="17" name="Rectangle 16">
             <a:extLst>
               <a:ext uri="{FF2B5EF4-FFF2-40B4-BE49-F238E27FC236}">
-                <a16:creationId xmlns:a16="http://schemas.microsoft.com/office/drawing/2014/main" id="{560B832E-B106-6C2B-1BB5-514A86AABB94}"/>
+                <a16:creationId xmlns:a16="http://schemas.microsoft.com/office/drawing/2014/main" id="{C0EB19FC-45D7-E717-3A8B-E24F64D98320}"/>
               </a:ext>
             </a:extLst>
           </p:cNvPr>
@@ -6072,7 +6072,7 @@
           <p:cNvPr id="18" name="Oval 17">
             <a:extLst>
               <a:ext uri="{FF2B5EF4-FFF2-40B4-BE49-F238E27FC236}">
-                <a16:creationId xmlns:a16="http://schemas.microsoft.com/office/drawing/2014/main" id="{DE44F8C1-F342-7A58-473E-4FB393D71541}"/>
+                <a16:creationId xmlns:a16="http://schemas.microsoft.com/office/drawing/2014/main" id="{A5343687-5775-D8D9-ADCB-13BF5CB96123}"/>
               </a:ext>
             </a:extLst>
           </p:cNvPr>
@@ -6148,7 +6148,7 @@
           <p:cNvPr id="19" name="Rectangle 18">
             <a:extLst>
               <a:ext uri="{FF2B5EF4-FFF2-40B4-BE49-F238E27FC236}">
-                <a16:creationId xmlns:a16="http://schemas.microsoft.com/office/drawing/2014/main" id="{F67B88AA-E8C6-CC02-E488-7E9AAB7B3BFB}"/>
+                <a16:creationId xmlns:a16="http://schemas.microsoft.com/office/drawing/2014/main" id="{C653C505-2FC8-9FEE-5FBA-0FFC340C804B}"/>
               </a:ext>
             </a:extLst>
           </p:cNvPr>
@@ -6204,7 +6204,7 @@
                 </a:solidFill>
                 <a:latin typeface="Calibri" panose="020F0502020204030204" pitchFamily="34" charset="0"/>
               </a:rPr>
-              <a:t>Self-contained</a:t>
+              <a:t>SFTP file store</a:t>
             </a:r>
           </a:p>
           <a:p>
@@ -6215,7 +6215,7 @@
                 </a:solidFill>
                 <a:latin typeface="Calibri" panose="020F0502020204030204" pitchFamily="34" charset="0"/>
               </a:rPr>
-              <a:t>Run anywhere, using sample files stored in the project.</a:t>
+              <a:t>Keep samples in the project, then copy them into four SFTP directories for the demo.</a:t>
             </a:r>
           </a:p>
         </p:txBody>
@@ -6225,7 +6225,7 @@
           <p:cNvPr id="20" name="Rectangle 19">
             <a:extLst>
               <a:ext uri="{FF2B5EF4-FFF2-40B4-BE49-F238E27FC236}">
-                <a16:creationId xmlns:a16="http://schemas.microsoft.com/office/drawing/2014/main" id="{5EE3BD2A-55D7-13C1-8B6E-CE189D85DF07}"/>
+                <a16:creationId xmlns:a16="http://schemas.microsoft.com/office/drawing/2014/main" id="{0719A390-CDA4-855F-36C3-8FC48D045C35}"/>
               </a:ext>
             </a:extLst>
           </p:cNvPr>
@@ -6291,7 +6291,7 @@
     </p:spTree>
     <p:extLst>
       <p:ext uri="{BB962C8B-B14F-4D97-AF65-F5344CB8AC3E}">
-        <p14:creationId xmlns:p14="http://schemas.microsoft.com/office/powerpoint/2010/main" val="2557522311"/>
+        <p14:creationId xmlns:p14="http://schemas.microsoft.com/office/powerpoint/2010/main" val="2464178592"/>
       </p:ext>
     </p:extLst>
   </p:cSld>
@@ -6323,7 +6323,7 @@
           <p:cNvPr id="2" name="Rectangle 1">
             <a:extLst>
               <a:ext uri="{FF2B5EF4-FFF2-40B4-BE49-F238E27FC236}">
-                <a16:creationId xmlns:a16="http://schemas.microsoft.com/office/drawing/2014/main" id="{CFA64832-B542-4F84-9172-D24DF67C9A73}"/>
+                <a16:creationId xmlns:a16="http://schemas.microsoft.com/office/drawing/2014/main" id="{95710C8F-D218-BAB0-386F-0F5652E91AE0}"/>
               </a:ext>
             </a:extLst>
           </p:cNvPr>
@@ -6398,7 +6398,7 @@
           <p:cNvPr id="3" name="Rectangle 2">
             <a:extLst>
               <a:ext uri="{FF2B5EF4-FFF2-40B4-BE49-F238E27FC236}">
-                <a16:creationId xmlns:a16="http://schemas.microsoft.com/office/drawing/2014/main" id="{064A453F-C1D6-4B8A-DD76-5E5F96F4D41C}"/>
+                <a16:creationId xmlns:a16="http://schemas.microsoft.com/office/drawing/2014/main" id="{B2CB01DC-A41D-1F0C-891F-56B22C7F6A20}"/>
               </a:ext>
             </a:extLst>
           </p:cNvPr>
@@ -6466,7 +6466,7 @@
           <p:cNvPr id="4" name="TextBox 3">
             <a:extLst>
               <a:ext uri="{FF2B5EF4-FFF2-40B4-BE49-F238E27FC236}">
-                <a16:creationId xmlns:a16="http://schemas.microsoft.com/office/drawing/2014/main" id="{2165AA06-F9A2-A474-DE1F-EE3BEA4DCBFF}"/>
+                <a16:creationId xmlns:a16="http://schemas.microsoft.com/office/drawing/2014/main" id="{D88C7F2D-4917-1C73-1892-960707298997}"/>
               </a:ext>
             </a:extLst>
           </p:cNvPr>
@@ -6506,7 +6506,7 @@
           <p:cNvPr id="5" name="TextBox 4">
             <a:extLst>
               <a:ext uri="{FF2B5EF4-FFF2-40B4-BE49-F238E27FC236}">
-                <a16:creationId xmlns:a16="http://schemas.microsoft.com/office/drawing/2014/main" id="{4C6A7DFD-D965-6869-9EDA-AB816957E912}"/>
+                <a16:creationId xmlns:a16="http://schemas.microsoft.com/office/drawing/2014/main" id="{DD13FED9-9D5D-8C15-3502-B2A3778F10E0}"/>
               </a:ext>
             </a:extLst>
           </p:cNvPr>
@@ -6547,7 +6547,7 @@
           <p:cNvPr id="6" name="Rectangle: Rounded Corners 5">
             <a:extLst>
               <a:ext uri="{FF2B5EF4-FFF2-40B4-BE49-F238E27FC236}">
-                <a16:creationId xmlns:a16="http://schemas.microsoft.com/office/drawing/2014/main" id="{8D80381C-CD26-84A7-37D2-B2EE79084862}"/>
+                <a16:creationId xmlns:a16="http://schemas.microsoft.com/office/drawing/2014/main" id="{95294380-9D29-0B79-B0A8-B1C25C9F15EC}"/>
               </a:ext>
             </a:extLst>
           </p:cNvPr>
@@ -6601,7 +6601,7 @@
                 </a:solidFill>
                 <a:latin typeface="Calibri" panose="020F0502020204030204" pitchFamily="34" charset="0"/>
               </a:rPr>
-              <a:t>Mule 4.12 application: edifact-orders-poc</a:t>
+              <a:t>Mule 4.12.2 application: edifact-orders-poc</a:t>
             </a:r>
           </a:p>
         </p:txBody>
@@ -6611,7 +6611,7 @@
           <p:cNvPr id="7" name="Rectangle: Rounded Corners 6">
             <a:extLst>
               <a:ext uri="{FF2B5EF4-FFF2-40B4-BE49-F238E27FC236}">
-                <a16:creationId xmlns:a16="http://schemas.microsoft.com/office/drawing/2014/main" id="{A9D59071-B641-0344-F7A9-8ADFD755AFA5}"/>
+                <a16:creationId xmlns:a16="http://schemas.microsoft.com/office/drawing/2014/main" id="{5B68AC9D-1597-6E5E-F11E-A3715323A09B}"/>
               </a:ext>
             </a:extLst>
           </p:cNvPr>
@@ -6677,7 +6677,7 @@
                 </a:solidFill>
                 <a:latin typeface="Calibri" panose="020F0502020204030204" pitchFamily="34" charset="0"/>
               </a:rPr>
-              <a:t>EDIFACT ORDERS file (D.96A)</a:t>
+              <a:t>SFTP edi  inbound EDIFACT</a:t>
             </a:r>
           </a:p>
         </p:txBody>
@@ -6687,7 +6687,7 @@
           <p:cNvPr id="8" name="Rectangle: Rounded Corners 7">
             <a:extLst>
               <a:ext uri="{FF2B5EF4-FFF2-40B4-BE49-F238E27FC236}">
-                <a16:creationId xmlns:a16="http://schemas.microsoft.com/office/drawing/2014/main" id="{750B3875-F255-6462-55C6-3DA18AE0DAC7}"/>
+                <a16:creationId xmlns:a16="http://schemas.microsoft.com/office/drawing/2014/main" id="{3663E8EA-C0D6-F744-461A-1589A22C391D}"/>
               </a:ext>
             </a:extLst>
           </p:cNvPr>
@@ -6753,7 +6753,7 @@
                 </a:solidFill>
                 <a:latin typeface="Calibri" panose="020F0502020204030204" pitchFamily="34" charset="0"/>
               </a:rPr>
-              <a:t>JSON or XML purchase order</a:t>
+              <a:t>SFTP jsonXmlFiles  JSON or XML</a:t>
             </a:r>
           </a:p>
         </p:txBody>
@@ -6763,7 +6763,7 @@
           <p:cNvPr id="9" name="Rectangle: Rounded Corners 8">
             <a:extLst>
               <a:ext uri="{FF2B5EF4-FFF2-40B4-BE49-F238E27FC236}">
-                <a16:creationId xmlns:a16="http://schemas.microsoft.com/office/drawing/2014/main" id="{011917E4-198B-2234-A9BE-36F0FDFC5168}"/>
+                <a16:creationId xmlns:a16="http://schemas.microsoft.com/office/drawing/2014/main" id="{FE2D7193-93CD-DE42-508A-B4C6442157B0}"/>
               </a:ext>
             </a:extLst>
           </p:cNvPr>
@@ -6823,7 +6823,7 @@
           <a:p>
             <a:pPr algn="ctr"/>
             <a:r>
-              <a:rPr lang="en-US" sz="1200" b="1">
+              <a:rPr lang="en-US" sz="1100" b="1">
                 <a:solidFill>
                   <a:srgbClr val="FFFFFF"/>
                 </a:solidFill>
@@ -6839,7 +6839,7 @@
           <p:cNvPr id="10" name="Rectangle: Rounded Corners 9">
             <a:extLst>
               <a:ext uri="{FF2B5EF4-FFF2-40B4-BE49-F238E27FC236}">
-                <a16:creationId xmlns:a16="http://schemas.microsoft.com/office/drawing/2014/main" id="{3D068992-DE23-2313-ED03-7D745EDF580B}"/>
+                <a16:creationId xmlns:a16="http://schemas.microsoft.com/office/drawing/2014/main" id="{848FD64E-DD0B-32D3-1405-C7E6A82CE779}"/>
               </a:ext>
             </a:extLst>
           </p:cNvPr>
@@ -6915,7 +6915,7 @@
           <p:cNvPr id="11" name="Rectangle: Rounded Corners 10">
             <a:extLst>
               <a:ext uri="{FF2B5EF4-FFF2-40B4-BE49-F238E27FC236}">
-                <a16:creationId xmlns:a16="http://schemas.microsoft.com/office/drawing/2014/main" id="{8B2FF38D-FE17-4DA7-6CB1-DF28DDDDA96D}"/>
+                <a16:creationId xmlns:a16="http://schemas.microsoft.com/office/drawing/2014/main" id="{F4215B52-FE35-986D-10D5-20BBC6D0E6FD}"/>
               </a:ext>
             </a:extLst>
           </p:cNvPr>
@@ -6991,7 +6991,7 @@
           <p:cNvPr id="12" name="Rectangle: Rounded Corners 11">
             <a:extLst>
               <a:ext uri="{FF2B5EF4-FFF2-40B4-BE49-F238E27FC236}">
-                <a16:creationId xmlns:a16="http://schemas.microsoft.com/office/drawing/2014/main" id="{6CF16648-7670-D76B-F550-B9A346F6587F}"/>
+                <a16:creationId xmlns:a16="http://schemas.microsoft.com/office/drawing/2014/main" id="{E55BFFD3-2FBA-941F-C73D-3D3E8AAC9FB2}"/>
               </a:ext>
             </a:extLst>
           </p:cNvPr>
@@ -7051,7 +7051,7 @@
           <a:p>
             <a:pPr algn="ctr"/>
             <a:r>
-              <a:rPr lang="en-US" sz="1200" b="1">
+              <a:rPr lang="en-US" sz="1100" b="1">
                 <a:solidFill>
                   <a:srgbClr val="FFFFFF"/>
                 </a:solidFill>
@@ -7067,7 +7067,7 @@
           <p:cNvPr id="13" name="Rectangle: Rounded Corners 12">
             <a:extLst>
               <a:ext uri="{FF2B5EF4-FFF2-40B4-BE49-F238E27FC236}">
-                <a16:creationId xmlns:a16="http://schemas.microsoft.com/office/drawing/2014/main" id="{000DDD8A-C871-A490-BCED-D40F1B30016B}"/>
+                <a16:creationId xmlns:a16="http://schemas.microsoft.com/office/drawing/2014/main" id="{203C8F5D-4E69-6835-ED2D-7F46AE0B5E6D}"/>
               </a:ext>
             </a:extLst>
           </p:cNvPr>
@@ -7133,7 +7133,7 @@
                 </a:solidFill>
                 <a:latin typeface="Calibri" panose="020F0502020204030204" pitchFamily="34" charset="0"/>
               </a:rPr>
-              <a:t>Load order and check status</a:t>
+              <a:t>Load JSON or XML</a:t>
             </a:r>
           </a:p>
         </p:txBody>
@@ -7143,7 +7143,7 @@
           <p:cNvPr id="14" name="Rectangle: Rounded Corners 13">
             <a:extLst>
               <a:ext uri="{FF2B5EF4-FFF2-40B4-BE49-F238E27FC236}">
-                <a16:creationId xmlns:a16="http://schemas.microsoft.com/office/drawing/2014/main" id="{CE40F5A1-D9B4-3049-367E-8F8129F7B6A6}"/>
+                <a16:creationId xmlns:a16="http://schemas.microsoft.com/office/drawing/2014/main" id="{B156A695-93CF-033F-A31C-9BBA147EA885}"/>
               </a:ext>
             </a:extLst>
           </p:cNvPr>
@@ -7209,7 +7209,7 @@
                 </a:solidFill>
                 <a:latin typeface="Calibri" panose="020F0502020204030204" pitchFamily="34" charset="0"/>
               </a:rPr>
-              <a:t>EDIFACT write (accepted only)</a:t>
+              <a:t>Write EDIFACT for every order</a:t>
             </a:r>
           </a:p>
         </p:txBody>
@@ -7219,7 +7219,7 @@
           <p:cNvPr id="15" name="Rectangle 14">
             <a:extLst>
               <a:ext uri="{FF2B5EF4-FFF2-40B4-BE49-F238E27FC236}">
-                <a16:creationId xmlns:a16="http://schemas.microsoft.com/office/drawing/2014/main" id="{DC72216F-DF85-6653-2FF6-48A2717F8C54}"/>
+                <a16:creationId xmlns:a16="http://schemas.microsoft.com/office/drawing/2014/main" id="{4A6E3D04-49E8-7E2C-2D66-8DD5B6229058}"/>
               </a:ext>
             </a:extLst>
           </p:cNvPr>
@@ -7285,7 +7285,7 @@
                 </a:solidFill>
                 <a:latin typeface="Calibri" panose="020F0502020204030204" pitchFamily="34" charset="0"/>
               </a:rPr>
-              <a:t>Shared: EDIFACT configuration (ORDERS D.96A)  |  Canonical purchase order  |  DataWeave modules</a:t>
+              <a:t>Shared: ORDERS D.96A  |  SFTP connection  |  Canonical purchase order  |  DataWeave modules</a:t>
             </a:r>
           </a:p>
         </p:txBody>
@@ -7295,7 +7295,7 @@
           <p:cNvPr id="16" name="Rectangle: Rounded Corners 15">
             <a:extLst>
               <a:ext uri="{FF2B5EF4-FFF2-40B4-BE49-F238E27FC236}">
-                <a16:creationId xmlns:a16="http://schemas.microsoft.com/office/drawing/2014/main" id="{E1497437-D07D-BAC8-7942-6A1E876926D0}"/>
+                <a16:creationId xmlns:a16="http://schemas.microsoft.com/office/drawing/2014/main" id="{8E9580EC-1B3E-82DD-88DF-70F9D0B171E2}"/>
               </a:ext>
             </a:extLst>
           </p:cNvPr>
@@ -7361,7 +7361,7 @@
                 </a:solidFill>
                 <a:latin typeface="Calibri" panose="020F0502020204030204" pitchFamily="34" charset="0"/>
               </a:rPr>
-              <a:t>JSON response, JSON and XML files</a:t>
+              <a:t>SFTP inboundResults  JSON and XML</a:t>
             </a:r>
           </a:p>
         </p:txBody>
@@ -7371,7 +7371,7 @@
           <p:cNvPr id="17" name="Rectangle: Rounded Corners 16">
             <a:extLst>
               <a:ext uri="{FF2B5EF4-FFF2-40B4-BE49-F238E27FC236}">
-                <a16:creationId xmlns:a16="http://schemas.microsoft.com/office/drawing/2014/main" id="{0E0AC06C-7AFE-4135-F23A-39C223EC95C3}"/>
+                <a16:creationId xmlns:a16="http://schemas.microsoft.com/office/drawing/2014/main" id="{3526346B-1A6C-7031-6D55-1A3F3D036164}"/>
               </a:ext>
             </a:extLst>
           </p:cNvPr>
@@ -7437,7 +7437,7 @@
                 </a:solidFill>
                 <a:latin typeface="Calibri" panose="020F0502020204030204" pitchFamily="34" charset="0"/>
               </a:rPr>
-              <a:t>EDIFACT file</a:t>
+              <a:t>SFTP outboundResults  EDIFACT</a:t>
             </a:r>
           </a:p>
         </p:txBody>
@@ -7447,7 +7447,7 @@
           <p:cNvPr id="18" name="Straight Connector 17">
             <a:extLst>
               <a:ext uri="{FF2B5EF4-FFF2-40B4-BE49-F238E27FC236}">
-                <a16:creationId xmlns:a16="http://schemas.microsoft.com/office/drawing/2014/main" id="{B2428897-1B54-8CDC-64D7-F6EEF2C8EE7B}"/>
+                <a16:creationId xmlns:a16="http://schemas.microsoft.com/office/drawing/2014/main" id="{4255C620-92BE-7F56-11AF-1D1B33510413}"/>
               </a:ext>
             </a:extLst>
           </p:cNvPr>
@@ -7489,7 +7489,7 @@
           <p:cNvPr id="19" name="Straight Connector 18">
             <a:extLst>
               <a:ext uri="{FF2B5EF4-FFF2-40B4-BE49-F238E27FC236}">
-                <a16:creationId xmlns:a16="http://schemas.microsoft.com/office/drawing/2014/main" id="{38E70FE2-D4C8-1B95-5684-1B187644FB4A}"/>
+                <a16:creationId xmlns:a16="http://schemas.microsoft.com/office/drawing/2014/main" id="{98D9D8DE-E97C-2B85-C142-6D27884A981A}"/>
               </a:ext>
             </a:extLst>
           </p:cNvPr>
@@ -7531,7 +7531,7 @@
           <p:cNvPr id="20" name="Straight Connector 19">
             <a:extLst>
               <a:ext uri="{FF2B5EF4-FFF2-40B4-BE49-F238E27FC236}">
-                <a16:creationId xmlns:a16="http://schemas.microsoft.com/office/drawing/2014/main" id="{66534E13-CDC8-2679-1EBB-53123F945FE2}"/>
+                <a16:creationId xmlns:a16="http://schemas.microsoft.com/office/drawing/2014/main" id="{15F98C82-67FB-2902-BA75-5AE99E3882CE}"/>
               </a:ext>
             </a:extLst>
           </p:cNvPr>
@@ -7573,7 +7573,7 @@
           <p:cNvPr id="21" name="Straight Connector 20">
             <a:extLst>
               <a:ext uri="{FF2B5EF4-FFF2-40B4-BE49-F238E27FC236}">
-                <a16:creationId xmlns:a16="http://schemas.microsoft.com/office/drawing/2014/main" id="{1B89A6F7-1E9F-CE38-1100-EBBCF9FD1236}"/>
+                <a16:creationId xmlns:a16="http://schemas.microsoft.com/office/drawing/2014/main" id="{9E86518E-4B85-A6A6-CF67-3D89558790F7}"/>
               </a:ext>
             </a:extLst>
           </p:cNvPr>
@@ -7615,7 +7615,7 @@
           <p:cNvPr id="22" name="Straight Connector 21">
             <a:extLst>
               <a:ext uri="{FF2B5EF4-FFF2-40B4-BE49-F238E27FC236}">
-                <a16:creationId xmlns:a16="http://schemas.microsoft.com/office/drawing/2014/main" id="{2C6D3393-5408-FEE5-FD8B-3F3FF2D2A713}"/>
+                <a16:creationId xmlns:a16="http://schemas.microsoft.com/office/drawing/2014/main" id="{76B026DC-A017-C33F-308B-40B193C79469}"/>
               </a:ext>
             </a:extLst>
           </p:cNvPr>
@@ -7657,7 +7657,7 @@
           <p:cNvPr id="23" name="Straight Connector 22">
             <a:extLst>
               <a:ext uri="{FF2B5EF4-FFF2-40B4-BE49-F238E27FC236}">
-                <a16:creationId xmlns:a16="http://schemas.microsoft.com/office/drawing/2014/main" id="{F6B5F16F-C172-6F4A-4475-CA2AC2C992C4}"/>
+                <a16:creationId xmlns:a16="http://schemas.microsoft.com/office/drawing/2014/main" id="{9D3DD90C-7F21-82D4-23D3-7AA8F54F8C42}"/>
               </a:ext>
             </a:extLst>
           </p:cNvPr>
@@ -7699,7 +7699,7 @@
           <p:cNvPr id="24" name="Straight Connector 23">
             <a:extLst>
               <a:ext uri="{FF2B5EF4-FFF2-40B4-BE49-F238E27FC236}">
-                <a16:creationId xmlns:a16="http://schemas.microsoft.com/office/drawing/2014/main" id="{AFF55F77-039C-96CC-6D5D-9C076B4C18AE}"/>
+                <a16:creationId xmlns:a16="http://schemas.microsoft.com/office/drawing/2014/main" id="{2B6519FE-CC7A-36C3-8212-424524A3DA64}"/>
               </a:ext>
             </a:extLst>
           </p:cNvPr>
@@ -7741,7 +7741,7 @@
           <p:cNvPr id="25" name="Straight Connector 24">
             <a:extLst>
               <a:ext uri="{FF2B5EF4-FFF2-40B4-BE49-F238E27FC236}">
-                <a16:creationId xmlns:a16="http://schemas.microsoft.com/office/drawing/2014/main" id="{B2975804-87E7-AB9D-BB3A-3424567CA6C5}"/>
+                <a16:creationId xmlns:a16="http://schemas.microsoft.com/office/drawing/2014/main" id="{71C27358-A53B-B7CD-DB1C-7E83D493CCD4}"/>
               </a:ext>
             </a:extLst>
           </p:cNvPr>
@@ -7783,7 +7783,7 @@
           <p:cNvPr id="26" name="TextBox 25">
             <a:extLst>
               <a:ext uri="{FF2B5EF4-FFF2-40B4-BE49-F238E27FC236}">
-                <a16:creationId xmlns:a16="http://schemas.microsoft.com/office/drawing/2014/main" id="{6A759F74-B422-7047-8D29-2E8660433CD9}"/>
+                <a16:creationId xmlns:a16="http://schemas.microsoft.com/office/drawing/2014/main" id="{A507624D-0C37-2F91-D0F1-6541CA468856}"/>
               </a:ext>
             </a:extLst>
           </p:cNvPr>
@@ -7793,7 +7793,7 @@
         <p:spPr>
           <a:xfrm>
             <a:off x="508000" y="5715000"/>
-            <a:ext cx="11176000" cy="292388"/>
+            <a:ext cx="11176000" cy="461665"/>
           </a:xfrm>
           <a:prstGeom prst="rect">
             <a:avLst/>
@@ -7808,13 +7808,13 @@
           <a:p>
             <a:pPr algn="ctr"/>
             <a:r>
-              <a:rPr lang="en-US" sz="1300">
+              <a:rPr lang="en-US" sz="1200">
                 <a:solidFill>
                   <a:srgbClr val="767676"/>
                 </a:solidFill>
                 <a:latin typeface="Calibri" panose="020F0502020204030204" pitchFamily="34" charset="0"/>
               </a:rPr>
-              <a:t>Two independent HTTP flows in one Mule application, sharing one EDIFACT configuration, one canonical order, and reusable DataWeave modules.</a:t>
+              <a:t>HTTP starts each call. Files move only through SFTP: edi and jsonXmlFiles in, inboundResults and outboundResults out. GET /orders/upload-sample copies project samples into edi and jsonXmlFiles.</a:t>
             </a:r>
           </a:p>
         </p:txBody>
@@ -7822,7 +7822,7 @@
     </p:spTree>
     <p:extLst>
       <p:ext uri="{BB962C8B-B14F-4D97-AF65-F5344CB8AC3E}">
-        <p14:creationId xmlns:p14="http://schemas.microsoft.com/office/powerpoint/2010/main" val="3536913538"/>
+        <p14:creationId xmlns:p14="http://schemas.microsoft.com/office/powerpoint/2010/main" val="115181489"/>
       </p:ext>
     </p:extLst>
   </p:cSld>
@@ -7854,7 +7854,7 @@
           <p:cNvPr id="2" name="Rectangle 1">
             <a:extLst>
               <a:ext uri="{FF2B5EF4-FFF2-40B4-BE49-F238E27FC236}">
-                <a16:creationId xmlns:a16="http://schemas.microsoft.com/office/drawing/2014/main" id="{3BA44454-2366-E3E0-47C9-3AC7A0802F7B}"/>
+                <a16:creationId xmlns:a16="http://schemas.microsoft.com/office/drawing/2014/main" id="{414594E9-1F90-F990-EE23-082E26E84ED0}"/>
               </a:ext>
             </a:extLst>
           </p:cNvPr>
@@ -7929,7 +7929,7 @@
           <p:cNvPr id="3" name="Rectangle 2">
             <a:extLst>
               <a:ext uri="{FF2B5EF4-FFF2-40B4-BE49-F238E27FC236}">
-                <a16:creationId xmlns:a16="http://schemas.microsoft.com/office/drawing/2014/main" id="{52C87D87-117B-4E80-FA14-D66D64D43852}"/>
+                <a16:creationId xmlns:a16="http://schemas.microsoft.com/office/drawing/2014/main" id="{77F6DF08-B43A-685B-2BB6-A3680D509271}"/>
               </a:ext>
             </a:extLst>
           </p:cNvPr>
@@ -7997,7 +7997,7 @@
           <p:cNvPr id="4" name="TextBox 3">
             <a:extLst>
               <a:ext uri="{FF2B5EF4-FFF2-40B4-BE49-F238E27FC236}">
-                <a16:creationId xmlns:a16="http://schemas.microsoft.com/office/drawing/2014/main" id="{A5A66485-D935-FDB2-5CA3-89367D92CC07}"/>
+                <a16:creationId xmlns:a16="http://schemas.microsoft.com/office/drawing/2014/main" id="{43E133F5-9194-9B35-4B9F-79BD16092F18}"/>
               </a:ext>
             </a:extLst>
           </p:cNvPr>
@@ -8037,7 +8037,7 @@
           <p:cNvPr id="5" name="TextBox 4">
             <a:extLst>
               <a:ext uri="{FF2B5EF4-FFF2-40B4-BE49-F238E27FC236}">
-                <a16:creationId xmlns:a16="http://schemas.microsoft.com/office/drawing/2014/main" id="{1684C534-4671-FC1F-F34A-2B209AFB3377}"/>
+                <a16:creationId xmlns:a16="http://schemas.microsoft.com/office/drawing/2014/main" id="{BEDC3AB5-292D-40A4-62B7-CFF692CEDCF4}"/>
               </a:ext>
             </a:extLst>
           </p:cNvPr>
@@ -8078,7 +8078,7 @@
           <p:cNvPr id="6" name="TextBox 5">
             <a:extLst>
               <a:ext uri="{FF2B5EF4-FFF2-40B4-BE49-F238E27FC236}">
-                <a16:creationId xmlns:a16="http://schemas.microsoft.com/office/drawing/2014/main" id="{8854FDF5-B153-D051-514C-FF128F5BFEA9}"/>
+                <a16:creationId xmlns:a16="http://schemas.microsoft.com/office/drawing/2014/main" id="{2D5FAD9C-8F43-F53D-2118-F3516DCA4F77}"/>
               </a:ext>
             </a:extLst>
           </p:cNvPr>
@@ -8118,7 +8118,7 @@
           <p:cNvPr id="7" name="Table 6">
             <a:extLst>
               <a:ext uri="{FF2B5EF4-FFF2-40B4-BE49-F238E27FC236}">
-                <a16:creationId xmlns:a16="http://schemas.microsoft.com/office/drawing/2014/main" id="{4650D5D4-23E2-F539-0474-DB0316178150}"/>
+                <a16:creationId xmlns:a16="http://schemas.microsoft.com/office/drawing/2014/main" id="{3CE16FE1-1041-A8C5-2E6C-CE528BF74C73}"/>
               </a:ext>
             </a:extLst>
           </p:cNvPr>
@@ -8128,7 +8128,7 @@
           <p:nvPr>
             <p:extLst>
               <p:ext uri="{D42A27DB-BD31-4B8C-83A1-F6EECF244321}">
-                <p14:modId xmlns:p14="http://schemas.microsoft.com/office/powerpoint/2010/main" val="1085251464"/>
+                <p14:modId xmlns:p14="http://schemas.microsoft.com/office/powerpoint/2010/main" val="3274731610"/>
               </p:ext>
             </p:extLst>
           </p:nvPr>
@@ -8147,21 +8147,21 @@
                 <a:gridCol w="4191000">
                   <a:extLst>
                     <a:ext uri="{9D8B030D-6E8A-4147-A177-3AD203B41FA5}">
-                      <a16:colId xmlns:a16="http://schemas.microsoft.com/office/drawing/2014/main" val="734817537"/>
+                      <a16:colId xmlns:a16="http://schemas.microsoft.com/office/drawing/2014/main" val="1051916858"/>
                     </a:ext>
                   </a:extLst>
                 </a:gridCol>
                 <a:gridCol w="3810000">
                   <a:extLst>
                     <a:ext uri="{9D8B030D-6E8A-4147-A177-3AD203B41FA5}">
-                      <a16:colId xmlns:a16="http://schemas.microsoft.com/office/drawing/2014/main" val="2000251194"/>
+                      <a16:colId xmlns:a16="http://schemas.microsoft.com/office/drawing/2014/main" val="2574317652"/>
                     </a:ext>
                   </a:extLst>
                 </a:gridCol>
                 <a:gridCol w="3175000">
                   <a:extLst>
                     <a:ext uri="{9D8B030D-6E8A-4147-A177-3AD203B41FA5}">
-                      <a16:colId xmlns:a16="http://schemas.microsoft.com/office/drawing/2014/main" val="399679538"/>
+                      <a16:colId xmlns:a16="http://schemas.microsoft.com/office/drawing/2014/main" val="572873113"/>
                     </a:ext>
                   </a:extLst>
                 </a:gridCol>
@@ -8235,7 +8235,7 @@
                 </a:tc>
                 <a:extLst>
                   <a:ext uri="{0D108BD9-81ED-4DB2-BD59-A6C34878D82A}">
-                    <a16:rowId xmlns:a16="http://schemas.microsoft.com/office/drawing/2014/main" val="881122549"/>
+                    <a16:rowId xmlns:a16="http://schemas.microsoft.com/office/drawing/2014/main" val="2049260565"/>
                   </a:ext>
                 </a:extLst>
               </a:tr>
@@ -8308,7 +8308,7 @@
                 </a:tc>
                 <a:extLst>
                   <a:ext uri="{0D108BD9-81ED-4DB2-BD59-A6C34878D82A}">
-                    <a16:rowId xmlns:a16="http://schemas.microsoft.com/office/drawing/2014/main" val="3302255525"/>
+                    <a16:rowId xmlns:a16="http://schemas.microsoft.com/office/drawing/2014/main" val="1651520019"/>
                   </a:ext>
                 </a:extLst>
               </a:tr>
@@ -8381,7 +8381,7 @@
                 </a:tc>
                 <a:extLst>
                   <a:ext uri="{0D108BD9-81ED-4DB2-BD59-A6C34878D82A}">
-                    <a16:rowId xmlns:a16="http://schemas.microsoft.com/office/drawing/2014/main" val="1776251780"/>
+                    <a16:rowId xmlns:a16="http://schemas.microsoft.com/office/drawing/2014/main" val="2268459755"/>
                   </a:ext>
                 </a:extLst>
               </a:tr>
@@ -8460,7 +8460,7 @@
                 </a:tc>
                 <a:extLst>
                   <a:ext uri="{0D108BD9-81ED-4DB2-BD59-A6C34878D82A}">
-                    <a16:rowId xmlns:a16="http://schemas.microsoft.com/office/drawing/2014/main" val="1027607050"/>
+                    <a16:rowId xmlns:a16="http://schemas.microsoft.com/office/drawing/2014/main" val="2177066134"/>
                   </a:ext>
                 </a:extLst>
               </a:tr>
@@ -8533,7 +8533,7 @@
                 </a:tc>
                 <a:extLst>
                   <a:ext uri="{0D108BD9-81ED-4DB2-BD59-A6C34878D82A}">
-                    <a16:rowId xmlns:a16="http://schemas.microsoft.com/office/drawing/2014/main" val="217976899"/>
+                    <a16:rowId xmlns:a16="http://schemas.microsoft.com/office/drawing/2014/main" val="2600894075"/>
                   </a:ext>
                 </a:extLst>
               </a:tr>
@@ -8606,7 +8606,7 @@
                 </a:tc>
                 <a:extLst>
                   <a:ext uri="{0D108BD9-81ED-4DB2-BD59-A6C34878D82A}">
-                    <a16:rowId xmlns:a16="http://schemas.microsoft.com/office/drawing/2014/main" val="3269542117"/>
+                    <a16:rowId xmlns:a16="http://schemas.microsoft.com/office/drawing/2014/main" val="2343498537"/>
                   </a:ext>
                 </a:extLst>
               </a:tr>
@@ -8619,7 +8619,7 @@
           <p:cNvPr id="8" name="TextBox 7">
             <a:extLst>
               <a:ext uri="{FF2B5EF4-FFF2-40B4-BE49-F238E27FC236}">
-                <a16:creationId xmlns:a16="http://schemas.microsoft.com/office/drawing/2014/main" id="{EED7EC6E-60EF-D85F-E4BE-3971CA5493A0}"/>
+                <a16:creationId xmlns:a16="http://schemas.microsoft.com/office/drawing/2014/main" id="{7FC99A77-E412-A669-DB2D-E6E2B12862EA}"/>
               </a:ext>
             </a:extLst>
           </p:cNvPr>
@@ -8657,7 +8657,7 @@
     </p:spTree>
     <p:extLst>
       <p:ext uri="{BB962C8B-B14F-4D97-AF65-F5344CB8AC3E}">
-        <p14:creationId xmlns:p14="http://schemas.microsoft.com/office/powerpoint/2010/main" val="3004185416"/>
+        <p14:creationId xmlns:p14="http://schemas.microsoft.com/office/powerpoint/2010/main" val="1073703649"/>
       </p:ext>
     </p:extLst>
   </p:cSld>
@@ -8689,7 +8689,7 @@
           <p:cNvPr id="2" name="Rectangle 1">
             <a:extLst>
               <a:ext uri="{FF2B5EF4-FFF2-40B4-BE49-F238E27FC236}">
-                <a16:creationId xmlns:a16="http://schemas.microsoft.com/office/drawing/2014/main" id="{F5B0AE15-C2B6-B249-7FD8-6BB2AD16E2C8}"/>
+                <a16:creationId xmlns:a16="http://schemas.microsoft.com/office/drawing/2014/main" id="{3CA984C9-AD87-481F-61FD-A515B91E6DE3}"/>
               </a:ext>
             </a:extLst>
           </p:cNvPr>
@@ -8764,7 +8764,7 @@
           <p:cNvPr id="3" name="Rectangle 2">
             <a:extLst>
               <a:ext uri="{FF2B5EF4-FFF2-40B4-BE49-F238E27FC236}">
-                <a16:creationId xmlns:a16="http://schemas.microsoft.com/office/drawing/2014/main" id="{02DA8DE7-7E59-7969-9E14-5582F5B1ABD4}"/>
+                <a16:creationId xmlns:a16="http://schemas.microsoft.com/office/drawing/2014/main" id="{4E2ED79A-EFDC-652A-411D-F72FE7841E96}"/>
               </a:ext>
             </a:extLst>
           </p:cNvPr>
@@ -8832,7 +8832,7 @@
           <p:cNvPr id="4" name="TextBox 3">
             <a:extLst>
               <a:ext uri="{FF2B5EF4-FFF2-40B4-BE49-F238E27FC236}">
-                <a16:creationId xmlns:a16="http://schemas.microsoft.com/office/drawing/2014/main" id="{D8B24953-928D-AEB3-268B-552D2CE90499}"/>
+                <a16:creationId xmlns:a16="http://schemas.microsoft.com/office/drawing/2014/main" id="{05DF1D81-6E70-0A74-FE07-F40FABE2F4DF}"/>
               </a:ext>
             </a:extLst>
           </p:cNvPr>
@@ -8872,7 +8872,7 @@
           <p:cNvPr id="5" name="TextBox 4">
             <a:extLst>
               <a:ext uri="{FF2B5EF4-FFF2-40B4-BE49-F238E27FC236}">
-                <a16:creationId xmlns:a16="http://schemas.microsoft.com/office/drawing/2014/main" id="{518642B1-8E7B-1F41-6336-F472D1FD4CF6}"/>
+                <a16:creationId xmlns:a16="http://schemas.microsoft.com/office/drawing/2014/main" id="{80E96AD4-A79F-E5FA-06D1-A89D63A3A1CF}"/>
               </a:ext>
             </a:extLst>
           </p:cNvPr>
@@ -8913,7 +8913,7 @@
           <p:cNvPr id="6" name="TextBox 5">
             <a:extLst>
               <a:ext uri="{FF2B5EF4-FFF2-40B4-BE49-F238E27FC236}">
-                <a16:creationId xmlns:a16="http://schemas.microsoft.com/office/drawing/2014/main" id="{A177EE3F-B602-52BC-B6F4-F08E44B839AC}"/>
+                <a16:creationId xmlns:a16="http://schemas.microsoft.com/office/drawing/2014/main" id="{78CF6F5C-376B-CAB7-1171-4B3A9DA65353}"/>
               </a:ext>
             </a:extLst>
           </p:cNvPr>
@@ -8922,8 +8922,8 @@
         </p:nvSpPr>
         <p:spPr>
           <a:xfrm>
-            <a:off x="508000" y="1168400"/>
-            <a:ext cx="11176000" cy="338554"/>
+            <a:off x="508000" y="1092200"/>
+            <a:ext cx="11176000" cy="523220"/>
           </a:xfrm>
           <a:prstGeom prst="rect">
             <a:avLst/>
@@ -8937,13 +8937,13 @@
           <a:lstStyle/>
           <a:p>
             <a:r>
-              <a:rPr lang="en-US" sz="1600">
+              <a:rPr lang="en-US" sz="1400">
                 <a:solidFill>
                   <a:srgbClr val="404040"/>
                 </a:solidFill>
                 <a:latin typeface="Calibri" panose="020F0502020204030204" pitchFamily="34" charset="0"/>
               </a:rPr>
-              <a:t>The demo runs locally on port 8081 with four calls.</a:t>
+              <a:t>The demo runs locally on port 8081. Copy the project samples to SFTP first, then run the order calls. A name ending in .xml is read as XML. Any other outbound file is read as JSON.</a:t>
             </a:r>
           </a:p>
         </p:txBody>
@@ -8953,7 +8953,7 @@
           <p:cNvPr id="7" name="Table 6">
             <a:extLst>
               <a:ext uri="{FF2B5EF4-FFF2-40B4-BE49-F238E27FC236}">
-                <a16:creationId xmlns:a16="http://schemas.microsoft.com/office/drawing/2014/main" id="{CF174FDB-0BB5-7448-AA6B-0243EB25545F}"/>
+                <a16:creationId xmlns:a16="http://schemas.microsoft.com/office/drawing/2014/main" id="{D39BD097-75DE-7E79-2998-147C83371DF9}"/>
               </a:ext>
             </a:extLst>
           </p:cNvPr>
@@ -8963,14 +8963,14 @@
           <p:nvPr>
             <p:extLst>
               <p:ext uri="{D42A27DB-BD31-4B8C-83A1-F6EECF244321}">
-                <p14:modId xmlns:p14="http://schemas.microsoft.com/office/powerpoint/2010/main" val="1616995165"/>
+                <p14:modId xmlns:p14="http://schemas.microsoft.com/office/powerpoint/2010/main" val="1318637266"/>
               </p:ext>
             </p:extLst>
           </p:nvPr>
         </p:nvGraphicFramePr>
         <p:xfrm>
-          <a:off x="508000" y="1714500"/>
-          <a:ext cx="11176000" cy="2540000"/>
+          <a:off x="508000" y="1778000"/>
+          <a:ext cx="11176000" cy="3048000"/>
         </p:xfrm>
         <a:graphic>
           <a:graphicData uri="http://schemas.openxmlformats.org/drawingml/2006/table">
@@ -8979,24 +8979,24 @@
                 <a:tableStyleId>{5C22544A-7EE6-4342-B048-85BDC9FD1C3A}</a:tableStyleId>
               </a:tblPr>
               <a:tblGrid>
-                <a:gridCol w="4826000">
+                <a:gridCol w="4318000">
                   <a:extLst>
                     <a:ext uri="{9D8B030D-6E8A-4147-A177-3AD203B41FA5}">
-                      <a16:colId xmlns:a16="http://schemas.microsoft.com/office/drawing/2014/main" val="3008619606"/>
+                      <a16:colId xmlns:a16="http://schemas.microsoft.com/office/drawing/2014/main" val="144975089"/>
                     </a:ext>
                   </a:extLst>
                 </a:gridCol>
-                <a:gridCol w="2413000">
+                <a:gridCol w="2540000">
                   <a:extLst>
                     <a:ext uri="{9D8B030D-6E8A-4147-A177-3AD203B41FA5}">
-                      <a16:colId xmlns:a16="http://schemas.microsoft.com/office/drawing/2014/main" val="1947917530"/>
+                      <a16:colId xmlns:a16="http://schemas.microsoft.com/office/drawing/2014/main" val="2381923909"/>
                     </a:ext>
                   </a:extLst>
                 </a:gridCol>
-                <a:gridCol w="3937000">
+                <a:gridCol w="4318000">
                   <a:extLst>
                     <a:ext uri="{9D8B030D-6E8A-4147-A177-3AD203B41FA5}">
-                      <a16:colId xmlns:a16="http://schemas.microsoft.com/office/drawing/2014/main" val="654844376"/>
+                      <a16:colId xmlns:a16="http://schemas.microsoft.com/office/drawing/2014/main" val="1705155338"/>
                     </a:ext>
                   </a:extLst>
                 </a:gridCol>
@@ -9008,7 +9008,7 @@
                     <a:lstStyle/>
                     <a:p>
                       <a:r>
-                        <a:rPr lang="en-US" sz="1300" b="1">
+                        <a:rPr lang="en-US" sz="1100" b="1">
                           <a:solidFill>
                             <a:srgbClr val="FFFFFF"/>
                           </a:solidFill>
@@ -9030,7 +9030,7 @@
                     <a:lstStyle/>
                     <a:p>
                       <a:r>
-                        <a:rPr lang="en-US" sz="1300" b="1">
+                        <a:rPr lang="en-US" sz="1100" b="1">
                           <a:solidFill>
                             <a:srgbClr val="FFFFFF"/>
                           </a:solidFill>
@@ -9052,7 +9052,7 @@
                     <a:lstStyle/>
                     <a:p>
                       <a:r>
-                        <a:rPr lang="en-US" sz="1300" b="1">
+                        <a:rPr lang="en-US" sz="1100" b="1">
                           <a:solidFill>
                             <a:srgbClr val="FFFFFF"/>
                           </a:solidFill>
@@ -9070,7 +9070,7 @@
                 </a:tc>
                 <a:extLst>
                   <a:ext uri="{0D108BD9-81ED-4DB2-BD59-A6C34878D82A}">
-                    <a16:rowId xmlns:a16="http://schemas.microsoft.com/office/drawing/2014/main" val="3269947808"/>
+                    <a16:rowId xmlns:a16="http://schemas.microsoft.com/office/drawing/2014/main" val="1997950879"/>
                   </a:ext>
                 </a:extLst>
               </a:tr>
@@ -9081,13 +9081,13 @@
                     <a:lstStyle/>
                     <a:p>
                       <a:r>
-                        <a:rPr lang="en-US" sz="1300" b="0">
+                        <a:rPr lang="en-US" sz="1100" b="0">
                           <a:solidFill>
                             <a:srgbClr val="404040"/>
                           </a:solidFill>
                           <a:latin typeface="Calibri" panose="020F0502020204030204" pitchFamily="34" charset="0"/>
                         </a:rPr>
-                        <a:t>GET /orders/from-edifact?file=orders-accepted.edi</a:t>
+                        <a:t>GET /orders/upload-sample?file=orders-accepted.edi</a:t>
                       </a:r>
                     </a:p>
                   </a:txBody>
@@ -9103,13 +9103,13 @@
                     <a:lstStyle/>
                     <a:p>
                       <a:r>
-                        <a:rPr lang="en-US" sz="1300" b="0">
+                        <a:rPr lang="en-US" sz="1100" b="0">
                           <a:solidFill>
                             <a:srgbClr val="404040"/>
                           </a:solidFill>
                           <a:latin typeface="Calibri" panose="020F0502020204030204" pitchFamily="34" charset="0"/>
                         </a:rPr>
-                        <a:t>EDIFACT order PO-1001</a:t>
+                        <a:t>Project sample</a:t>
                       </a:r>
                     </a:p>
                   </a:txBody>
@@ -9125,13 +9125,13 @@
                     <a:lstStyle/>
                     <a:p>
                       <a:r>
-                        <a:rPr lang="en-US" sz="1300" b="0">
+                        <a:rPr lang="en-US" sz="1100" b="0">
                           <a:solidFill>
                             <a:srgbClr val="404040"/>
                           </a:solidFill>
                           <a:latin typeface="Calibri" panose="020F0502020204030204" pitchFamily="34" charset="0"/>
                         </a:rPr>
-                        <a:t>ACCEPTED, total 25,000 PHP. JSON and XML written to the outbox.</a:t>
+                        <a:t>Written to edi/orders-accepted.edi. JSON and XML samples go to jsonXmlFiles.</a:t>
                       </a:r>
                     </a:p>
                   </a:txBody>
@@ -9143,7 +9143,7 @@
                 </a:tc>
                 <a:extLst>
                   <a:ext uri="{0D108BD9-81ED-4DB2-BD59-A6C34878D82A}">
-                    <a16:rowId xmlns:a16="http://schemas.microsoft.com/office/drawing/2014/main" val="505971917"/>
+                    <a16:rowId xmlns:a16="http://schemas.microsoft.com/office/drawing/2014/main" val="3324905324"/>
                   </a:ext>
                 </a:extLst>
               </a:tr>
@@ -9154,13 +9154,13 @@
                     <a:lstStyle/>
                     <a:p>
                       <a:r>
-                        <a:rPr lang="en-US" sz="1300" b="0">
+                        <a:rPr lang="en-US" sz="1100" b="0">
                           <a:solidFill>
                             <a:srgbClr val="404040"/>
                           </a:solidFill>
                           <a:latin typeface="Calibri" panose="020F0502020204030204" pitchFamily="34" charset="0"/>
                         </a:rPr>
-                        <a:t>GET /orders/from-edifact?file=orders-rejected.edi</a:t>
+                        <a:t>GET /orders/from-edifact?file=orders-accepted.edi</a:t>
                       </a:r>
                     </a:p>
                   </a:txBody>
@@ -9176,13 +9176,13 @@
                     <a:lstStyle/>
                     <a:p>
                       <a:r>
-                        <a:rPr lang="en-US" sz="1300" b="0">
+                        <a:rPr lang="en-US" sz="1100" b="0">
                           <a:solidFill>
                             <a:srgbClr val="404040"/>
                           </a:solidFill>
                           <a:latin typeface="Calibri" panose="020F0502020204030204" pitchFamily="34" charset="0"/>
                         </a:rPr>
-                        <a:t>EDIFACT order PO-1002</a:t>
+                        <a:t>PO-1001 from edi</a:t>
                       </a:r>
                     </a:p>
                   </a:txBody>
@@ -9198,13 +9198,13 @@
                     <a:lstStyle/>
                     <a:p>
                       <a:r>
-                        <a:rPr lang="en-US" sz="1300" b="0">
+                        <a:rPr lang="en-US" sz="1100" b="0">
                           <a:solidFill>
                             <a:srgbClr val="404040"/>
                           </a:solidFill>
                           <a:latin typeface="Calibri" panose="020F0502020204030204" pitchFamily="34" charset="0"/>
                         </a:rPr>
-                        <a:t>REJECTED with INVALID_QUANTITY and CREDIT_LIMIT_EXCEEDED.</a:t>
+                        <a:t>ACCEPTED, total 25,000 PHP. JSON and XML written to inboundResults.</a:t>
                       </a:r>
                     </a:p>
                   </a:txBody>
@@ -9216,7 +9216,7 @@
                 </a:tc>
                 <a:extLst>
                   <a:ext uri="{0D108BD9-81ED-4DB2-BD59-A6C34878D82A}">
-                    <a16:rowId xmlns:a16="http://schemas.microsoft.com/office/drawing/2014/main" val="3500437055"/>
+                    <a16:rowId xmlns:a16="http://schemas.microsoft.com/office/drawing/2014/main" val="189209734"/>
                   </a:ext>
                 </a:extLst>
               </a:tr>
@@ -9227,13 +9227,13 @@
                     <a:lstStyle/>
                     <a:p>
                       <a:r>
-                        <a:rPr lang="en-US" sz="1300" b="0">
+                        <a:rPr lang="en-US" sz="1100" b="0">
                           <a:solidFill>
                             <a:srgbClr val="404040"/>
                           </a:solidFill>
                           <a:latin typeface="Calibri" panose="020F0502020204030204" pitchFamily="34" charset="0"/>
                         </a:rPr>
-                        <a:t>GET /orders/to-edifact?file=orders-accepted.json (or .xml)</a:t>
+                        <a:t>GET /orders/from-edifact?file=orders-rejected.edi</a:t>
                       </a:r>
                     </a:p>
                   </a:txBody>
@@ -9249,13 +9249,13 @@
                     <a:lstStyle/>
                     <a:p>
                       <a:r>
-                        <a:rPr lang="en-US" sz="1300" b="0">
+                        <a:rPr lang="en-US" sz="1100" b="0">
                           <a:solidFill>
                             <a:srgbClr val="404040"/>
                           </a:solidFill>
                           <a:latin typeface="Calibri" panose="020F0502020204030204" pitchFamily="34" charset="0"/>
                         </a:rPr>
-                        <a:t>Canonical order PO-1001</a:t>
+                        <a:t>PO-1002 from edi</a:t>
                       </a:r>
                     </a:p>
                   </a:txBody>
@@ -9271,13 +9271,13 @@
                     <a:lstStyle/>
                     <a:p>
                       <a:r>
-                        <a:rPr lang="en-US" sz="1300" b="0">
+                        <a:rPr lang="en-US" sz="1100" b="0">
                           <a:solidFill>
                             <a:srgbClr val="404040"/>
                           </a:solidFill>
                           <a:latin typeface="Calibri" panose="020F0502020204030204" pitchFamily="34" charset="0"/>
                         </a:rPr>
-                        <a:t>EDIFACT file written. Round-trip check matches.</a:t>
+                        <a:t>REJECTED with INVALID_QUANTITY and CREDIT_LIMIT_EXCEEDED. JSON and XML written to inboundResults.</a:t>
                       </a:r>
                     </a:p>
                   </a:txBody>
@@ -9289,7 +9289,7 @@
                 </a:tc>
                 <a:extLst>
                   <a:ext uri="{0D108BD9-81ED-4DB2-BD59-A6C34878D82A}">
-                    <a16:rowId xmlns:a16="http://schemas.microsoft.com/office/drawing/2014/main" val="4157931090"/>
+                    <a16:rowId xmlns:a16="http://schemas.microsoft.com/office/drawing/2014/main" val="1213063059"/>
                   </a:ext>
                 </a:extLst>
               </a:tr>
@@ -9300,13 +9300,13 @@
                     <a:lstStyle/>
                     <a:p>
                       <a:r>
-                        <a:rPr lang="en-US" sz="1300" b="0">
+                        <a:rPr lang="en-US" sz="1100" b="0">
                           <a:solidFill>
                             <a:srgbClr val="404040"/>
                           </a:solidFill>
                           <a:latin typeface="Calibri" panose="020F0502020204030204" pitchFamily="34" charset="0"/>
                         </a:rPr>
-                        <a:t>GET /orders/to-edifact?file=orders-rejected.json</a:t>
+                        <a:t>GET /orders/to-edifact?file=orders-accepted.json</a:t>
                       </a:r>
                     </a:p>
                   </a:txBody>
@@ -9322,13 +9322,13 @@
                     <a:lstStyle/>
                     <a:p>
                       <a:r>
-                        <a:rPr lang="en-US" sz="1300" b="0">
+                        <a:rPr lang="en-US" sz="1100" b="0">
                           <a:solidFill>
                             <a:srgbClr val="404040"/>
                           </a:solidFill>
                           <a:latin typeface="Calibri" panose="020F0502020204030204" pitchFamily="34" charset="0"/>
                         </a:rPr>
-                        <a:t>Canonical order PO-1002</a:t>
+                        <a:t>PO-1001 from jsonXmlFiles</a:t>
                       </a:r>
                     </a:p>
                   </a:txBody>
@@ -9344,13 +9344,13 @@
                     <a:lstStyle/>
                     <a:p>
                       <a:r>
-                        <a:rPr lang="en-US" sz="1300" b="0">
+                        <a:rPr lang="en-US" sz="1100" b="0">
                           <a:solidFill>
                             <a:srgbClr val="404040"/>
                           </a:solidFill>
                           <a:latin typeface="Calibri" panose="020F0502020204030204" pitchFamily="34" charset="0"/>
                         </a:rPr>
-                        <a:t>Not converted. Reason codes returned.</a:t>
+                        <a:t>EDIFACT written to outboundResults/orders-accepted.edi. Round-trip check matches.</a:t>
                       </a:r>
                     </a:p>
                   </a:txBody>
@@ -9362,7 +9362,80 @@
                 </a:tc>
                 <a:extLst>
                   <a:ext uri="{0D108BD9-81ED-4DB2-BD59-A6C34878D82A}">
-                    <a16:rowId xmlns:a16="http://schemas.microsoft.com/office/drawing/2014/main" val="3890467136"/>
+                    <a16:rowId xmlns:a16="http://schemas.microsoft.com/office/drawing/2014/main" val="2256004217"/>
+                  </a:ext>
+                </a:extLst>
+              </a:tr>
+              <a:tr h="508000">
+                <a:tc>
+                  <a:txBody>
+                    <a:bodyPr/>
+                    <a:lstStyle/>
+                    <a:p>
+                      <a:r>
+                        <a:rPr lang="en-US" sz="1100" b="0">
+                          <a:solidFill>
+                            <a:srgbClr val="404040"/>
+                          </a:solidFill>
+                          <a:latin typeface="Calibri" panose="020F0502020204030204" pitchFamily="34" charset="0"/>
+                        </a:rPr>
+                        <a:t>GET /orders/to-edifact?file=orders-rejected.json</a:t>
+                      </a:r>
+                    </a:p>
+                  </a:txBody>
+                  <a:tcPr>
+                    <a:solidFill>
+                      <a:srgbClr val="F2F7FC"/>
+                    </a:solidFill>
+                  </a:tcPr>
+                </a:tc>
+                <a:tc>
+                  <a:txBody>
+                    <a:bodyPr/>
+                    <a:lstStyle/>
+                    <a:p>
+                      <a:r>
+                        <a:rPr lang="en-US" sz="1100" b="0">
+                          <a:solidFill>
+                            <a:srgbClr val="404040"/>
+                          </a:solidFill>
+                          <a:latin typeface="Calibri" panose="020F0502020204030204" pitchFamily="34" charset="0"/>
+                        </a:rPr>
+                        <a:t>PO-1002 from jsonXmlFiles</a:t>
+                      </a:r>
+                    </a:p>
+                  </a:txBody>
+                  <a:tcPr>
+                    <a:solidFill>
+                      <a:srgbClr val="F2F7FC"/>
+                    </a:solidFill>
+                  </a:tcPr>
+                </a:tc>
+                <a:tc>
+                  <a:txBody>
+                    <a:bodyPr/>
+                    <a:lstStyle/>
+                    <a:p>
+                      <a:r>
+                        <a:rPr lang="en-US" sz="1100" b="0">
+                          <a:solidFill>
+                            <a:srgbClr val="404040"/>
+                          </a:solidFill>
+                          <a:latin typeface="Calibri" panose="020F0502020204030204" pitchFamily="34" charset="0"/>
+                        </a:rPr>
+                        <a:t>REJECTED with the same reason codes. EDIFACT is still written to outboundResults/orders-rejected.edi.</a:t>
+                      </a:r>
+                    </a:p>
+                  </a:txBody>
+                  <a:tcPr>
+                    <a:solidFill>
+                      <a:srgbClr val="F2F7FC"/>
+                    </a:solidFill>
+                  </a:tcPr>
+                </a:tc>
+                <a:extLst>
+                  <a:ext uri="{0D108BD9-81ED-4DB2-BD59-A6C34878D82A}">
+                    <a16:rowId xmlns:a16="http://schemas.microsoft.com/office/drawing/2014/main" val="1612272482"/>
                   </a:ext>
                 </a:extLst>
               </a:tr>
@@ -9370,10 +9443,50 @@
           </a:graphicData>
         </a:graphic>
       </p:graphicFrame>
+      <p:sp>
+        <p:nvSpPr>
+          <p:cNvPr id="8" name="TextBox 7">
+            <a:extLst>
+              <a:ext uri="{FF2B5EF4-FFF2-40B4-BE49-F238E27FC236}">
+                <a16:creationId xmlns:a16="http://schemas.microsoft.com/office/drawing/2014/main" id="{E88346DE-65F3-8517-BC79-4401343673FC}"/>
+              </a:ext>
+            </a:extLst>
+          </p:cNvPr>
+          <p:cNvSpPr txBox="1"/>
+          <p:nvPr/>
+        </p:nvSpPr>
+        <p:spPr>
+          <a:xfrm>
+            <a:off x="508000" y="5461000"/>
+            <a:ext cx="11176000" cy="430887"/>
+          </a:xfrm>
+          <a:prstGeom prst="rect">
+            <a:avLst/>
+          </a:prstGeom>
+          <a:noFill/>
+        </p:spPr>
+        <p:txBody>
+          <a:bodyPr vert="horz" wrap="square" rtlCol="0">
+            <a:spAutoFit/>
+          </a:bodyPr>
+          <a:lstStyle/>
+          <a:p>
+            <a:r>
+              <a:rPr lang="en-US" sz="1100">
+                <a:solidFill>
+                  <a:srgbClr val="767676"/>
+                </a:solidFill>
+                <a:latin typeface="Calibri" panose="020F0502020204030204" pitchFamily="34" charset="0"/>
+              </a:rPr>
+              <a:t>PO-1001 has SKU100 quantity 10 at 1,500 and SKU200 quantity 4 at 2,500, order date 20261021 and delivery date 20261115. PO-1002 has SKU100 quantity 0 at 500 and SKU900 quantity 200 at 1,000, order date 20261021 and delivery date 20261120, total 200,000 PHP. orders-accepted.xml and orders-rejected.xml use the same outbound call.</a:t>
+            </a:r>
+          </a:p>
+        </p:txBody>
+      </p:sp>
     </p:spTree>
     <p:extLst>
       <p:ext uri="{BB962C8B-B14F-4D97-AF65-F5344CB8AC3E}">
-        <p14:creationId xmlns:p14="http://schemas.microsoft.com/office/powerpoint/2010/main" val="2546053285"/>
+        <p14:creationId xmlns:p14="http://schemas.microsoft.com/office/powerpoint/2010/main" val="2320512610"/>
       </p:ext>
     </p:extLst>
   </p:cSld>
@@ -9405,7 +9518,7 @@
           <p:cNvPr id="2" name="Rectangle 1">
             <a:extLst>
               <a:ext uri="{FF2B5EF4-FFF2-40B4-BE49-F238E27FC236}">
-                <a16:creationId xmlns:a16="http://schemas.microsoft.com/office/drawing/2014/main" id="{3B6AF569-FEA3-A2FF-0391-F39DBD07DB9A}"/>
+                <a16:creationId xmlns:a16="http://schemas.microsoft.com/office/drawing/2014/main" id="{D6AAB9A8-38FA-243F-6428-271ED23712F6}"/>
               </a:ext>
             </a:extLst>
           </p:cNvPr>
@@ -9480,7 +9593,7 @@
           <p:cNvPr id="3" name="Rectangle 2">
             <a:extLst>
               <a:ext uri="{FF2B5EF4-FFF2-40B4-BE49-F238E27FC236}">
-                <a16:creationId xmlns:a16="http://schemas.microsoft.com/office/drawing/2014/main" id="{270C1EFB-082D-8BA6-95DE-39348317F18C}"/>
+                <a16:creationId xmlns:a16="http://schemas.microsoft.com/office/drawing/2014/main" id="{FCCBBF93-AD28-3773-09BD-CD035A137CB2}"/>
               </a:ext>
             </a:extLst>
           </p:cNvPr>
@@ -9548,7 +9661,7 @@
           <p:cNvPr id="4" name="TextBox 3">
             <a:extLst>
               <a:ext uri="{FF2B5EF4-FFF2-40B4-BE49-F238E27FC236}">
-                <a16:creationId xmlns:a16="http://schemas.microsoft.com/office/drawing/2014/main" id="{D40057E0-D90A-DBE5-A36A-89E20A6B87FA}"/>
+                <a16:creationId xmlns:a16="http://schemas.microsoft.com/office/drawing/2014/main" id="{76E0875F-6769-92AE-4FB8-DA1D0F7BDAE1}"/>
               </a:ext>
             </a:extLst>
           </p:cNvPr>
@@ -9588,7 +9701,7 @@
           <p:cNvPr id="5" name="TextBox 4">
             <a:extLst>
               <a:ext uri="{FF2B5EF4-FFF2-40B4-BE49-F238E27FC236}">
-                <a16:creationId xmlns:a16="http://schemas.microsoft.com/office/drawing/2014/main" id="{9F98037D-148E-CD04-CD8F-262E845A2734}"/>
+                <a16:creationId xmlns:a16="http://schemas.microsoft.com/office/drawing/2014/main" id="{CBA4A845-C7DE-5DE7-E980-C1E3F80502C9}"/>
               </a:ext>
             </a:extLst>
           </p:cNvPr>
@@ -9629,7 +9742,7 @@
           <p:cNvPr id="6" name="Rectangle 5">
             <a:extLst>
               <a:ext uri="{FF2B5EF4-FFF2-40B4-BE49-F238E27FC236}">
-                <a16:creationId xmlns:a16="http://schemas.microsoft.com/office/drawing/2014/main" id="{999E3055-800E-0F9C-E243-D5819FA93A31}"/>
+                <a16:creationId xmlns:a16="http://schemas.microsoft.com/office/drawing/2014/main" id="{A67B94AB-8EE9-1D57-1736-EDE664BC6D82}"/>
               </a:ext>
             </a:extLst>
           </p:cNvPr>
@@ -9685,7 +9798,7 @@
                 </a:solidFill>
                 <a:latin typeface="Calibri" panose="020F0502020204030204" pitchFamily="34" charset="0"/>
               </a:rPr>
-              <a:t>Mule runtime 4.12.5</a:t>
+              <a:t>Mule runtime 4.12.2</a:t>
             </a:r>
           </a:p>
           <a:p>
@@ -9706,7 +9819,7 @@
           <p:cNvPr id="7" name="Rectangle 6">
             <a:extLst>
               <a:ext uri="{FF2B5EF4-FFF2-40B4-BE49-F238E27FC236}">
-                <a16:creationId xmlns:a16="http://schemas.microsoft.com/office/drawing/2014/main" id="{72F41B4F-130E-7BF3-AAFE-BE57B8DF3592}"/>
+                <a16:creationId xmlns:a16="http://schemas.microsoft.com/office/drawing/2014/main" id="{7D4CE5E8-0D8A-DD85-B9BF-311CC3CBF7CB}"/>
               </a:ext>
             </a:extLst>
           </p:cNvPr>
@@ -9774,7 +9887,7 @@
           <p:cNvPr id="8" name="Rectangle 7">
             <a:extLst>
               <a:ext uri="{FF2B5EF4-FFF2-40B4-BE49-F238E27FC236}">
-                <a16:creationId xmlns:a16="http://schemas.microsoft.com/office/drawing/2014/main" id="{942A47AE-3382-90B5-131E-D103C067E1C2}"/>
+                <a16:creationId xmlns:a16="http://schemas.microsoft.com/office/drawing/2014/main" id="{544C736D-F96E-3FDC-7329-08C2BC515808}"/>
               </a:ext>
             </a:extLst>
           </p:cNvPr>
@@ -9851,7 +9964,7 @@
           <p:cNvPr id="9" name="Rectangle 8">
             <a:extLst>
               <a:ext uri="{FF2B5EF4-FFF2-40B4-BE49-F238E27FC236}">
-                <a16:creationId xmlns:a16="http://schemas.microsoft.com/office/drawing/2014/main" id="{4BBF8F69-53AC-E0B5-DE77-BB3322658CBC}"/>
+                <a16:creationId xmlns:a16="http://schemas.microsoft.com/office/drawing/2014/main" id="{8FF8CD28-1199-EF27-76F2-A08A8F0178F2}"/>
               </a:ext>
             </a:extLst>
           </p:cNvPr>
@@ -9919,7 +10032,7 @@
           <p:cNvPr id="10" name="Rectangle 9">
             <a:extLst>
               <a:ext uri="{FF2B5EF4-FFF2-40B4-BE49-F238E27FC236}">
-                <a16:creationId xmlns:a16="http://schemas.microsoft.com/office/drawing/2014/main" id="{648A0061-99F9-0072-80FE-94209611EEE2}"/>
+                <a16:creationId xmlns:a16="http://schemas.microsoft.com/office/drawing/2014/main" id="{A5DD2FBB-F138-2570-34CD-66793F6534E1}"/>
               </a:ext>
             </a:extLst>
           </p:cNvPr>
@@ -9996,7 +10109,7 @@
           <p:cNvPr id="11" name="Rectangle 10">
             <a:extLst>
               <a:ext uri="{FF2B5EF4-FFF2-40B4-BE49-F238E27FC236}">
-                <a16:creationId xmlns:a16="http://schemas.microsoft.com/office/drawing/2014/main" id="{D1B8FDE1-C58E-C821-6484-1A5EFC1CCA47}"/>
+                <a16:creationId xmlns:a16="http://schemas.microsoft.com/office/drawing/2014/main" id="{4D57471B-84AA-E605-75D8-70BEEF9070B2}"/>
               </a:ext>
             </a:extLst>
           </p:cNvPr>
@@ -10064,7 +10177,7 @@
           <p:cNvPr id="12" name="Rectangle 11">
             <a:extLst>
               <a:ext uri="{FF2B5EF4-FFF2-40B4-BE49-F238E27FC236}">
-                <a16:creationId xmlns:a16="http://schemas.microsoft.com/office/drawing/2014/main" id="{675618C6-E0DB-7D07-122B-22DDFB871573}"/>
+                <a16:creationId xmlns:a16="http://schemas.microsoft.com/office/drawing/2014/main" id="{688C90E5-6740-B3CD-1303-8A61D8323130}"/>
               </a:ext>
             </a:extLst>
           </p:cNvPr>
@@ -10120,7 +10233,7 @@
                 </a:solidFill>
                 <a:latin typeface="Calibri" panose="020F0502020204030204" pitchFamily="34" charset="0"/>
               </a:rPr>
-              <a:t>HTTP 1.12.1 and File 1.5.7 connectors</a:t>
+              <a:t>HTTP Connector 1.12.1</a:t>
             </a:r>
           </a:p>
           <a:p>
@@ -10131,7 +10244,7 @@
                 </a:solidFill>
                 <a:latin typeface="Calibri" panose="020F0502020204030204" pitchFamily="34" charset="0"/>
               </a:rPr>
-              <a:t>Demo endpoints and output files.</a:t>
+              <a:t>Demo endpoints on port 8081.</a:t>
             </a:r>
           </a:p>
         </p:txBody>
@@ -10141,7 +10254,7 @@
           <p:cNvPr id="13" name="Rectangle 12">
             <a:extLst>
               <a:ext uri="{FF2B5EF4-FFF2-40B4-BE49-F238E27FC236}">
-                <a16:creationId xmlns:a16="http://schemas.microsoft.com/office/drawing/2014/main" id="{70F919F1-0C2C-3448-AE73-F333D75E5848}"/>
+                <a16:creationId xmlns:a16="http://schemas.microsoft.com/office/drawing/2014/main" id="{D0B84A0E-89C0-A888-7030-58F8D43C898A}"/>
               </a:ext>
             </a:extLst>
           </p:cNvPr>
@@ -10209,7 +10322,7 @@
           <p:cNvPr id="14" name="Rectangle 13">
             <a:extLst>
               <a:ext uri="{FF2B5EF4-FFF2-40B4-BE49-F238E27FC236}">
-                <a16:creationId xmlns:a16="http://schemas.microsoft.com/office/drawing/2014/main" id="{4ACB1434-E3EC-7001-66F5-387C8F203E04}"/>
+                <a16:creationId xmlns:a16="http://schemas.microsoft.com/office/drawing/2014/main" id="{E9151ECF-3570-F738-37AD-42135E64CF0E}"/>
               </a:ext>
             </a:extLst>
           </p:cNvPr>
@@ -10265,7 +10378,7 @@
                 </a:solidFill>
                 <a:latin typeface="Calibri" panose="020F0502020204030204" pitchFamily="34" charset="0"/>
               </a:rPr>
-              <a:t>Anypoint Code Builder or Studio</a:t>
+              <a:t>SFTP Connector 2.7.4</a:t>
             </a:r>
           </a:p>
           <a:p>
@@ -10276,7 +10389,7 @@
                 </a:solidFill>
                 <a:latin typeface="Calibri" panose="020F0502020204030204" pitchFamily="34" charset="0"/>
               </a:rPr>
-              <a:t>Build and run the application.</a:t>
+              <a:t>Reads and writes the four order directories.</a:t>
             </a:r>
           </a:p>
         </p:txBody>
@@ -10286,7 +10399,7 @@
           <p:cNvPr id="15" name="Rectangle 14">
             <a:extLst>
               <a:ext uri="{FF2B5EF4-FFF2-40B4-BE49-F238E27FC236}">
-                <a16:creationId xmlns:a16="http://schemas.microsoft.com/office/drawing/2014/main" id="{1A682186-7C04-5489-6E3C-1C51E0AB080A}"/>
+                <a16:creationId xmlns:a16="http://schemas.microsoft.com/office/drawing/2014/main" id="{BE0C5F33-9ADE-ABE9-866F-16C10B1543A2}"/>
               </a:ext>
             </a:extLst>
           </p:cNvPr>
@@ -10352,7 +10465,7 @@
     </p:spTree>
     <p:extLst>
       <p:ext uri="{BB962C8B-B14F-4D97-AF65-F5344CB8AC3E}">
-        <p14:creationId xmlns:p14="http://schemas.microsoft.com/office/powerpoint/2010/main" val="2356438994"/>
+        <p14:creationId xmlns:p14="http://schemas.microsoft.com/office/powerpoint/2010/main" val="2252224213"/>
       </p:ext>
     </p:extLst>
   </p:cSld>
@@ -10384,7 +10497,7 @@
           <p:cNvPr id="2" name="Rectangle 1">
             <a:extLst>
               <a:ext uri="{FF2B5EF4-FFF2-40B4-BE49-F238E27FC236}">
-                <a16:creationId xmlns:a16="http://schemas.microsoft.com/office/drawing/2014/main" id="{060CD3C3-BAD9-4E1E-C06E-E82844C787A8}"/>
+                <a16:creationId xmlns:a16="http://schemas.microsoft.com/office/drawing/2014/main" id="{A4A848AA-FD2F-97E2-2513-4CEF31F3BD55}"/>
               </a:ext>
             </a:extLst>
           </p:cNvPr>
@@ -10459,7 +10572,7 @@
           <p:cNvPr id="3" name="Rectangle 2">
             <a:extLst>
               <a:ext uri="{FF2B5EF4-FFF2-40B4-BE49-F238E27FC236}">
-                <a16:creationId xmlns:a16="http://schemas.microsoft.com/office/drawing/2014/main" id="{78CC8DEC-00AC-342B-3CBA-4C19F1A49660}"/>
+                <a16:creationId xmlns:a16="http://schemas.microsoft.com/office/drawing/2014/main" id="{5024887C-8DA7-05BE-9513-8B6F8496013A}"/>
               </a:ext>
             </a:extLst>
           </p:cNvPr>
@@ -10527,7 +10640,7 @@
           <p:cNvPr id="4" name="TextBox 3">
             <a:extLst>
               <a:ext uri="{FF2B5EF4-FFF2-40B4-BE49-F238E27FC236}">
-                <a16:creationId xmlns:a16="http://schemas.microsoft.com/office/drawing/2014/main" id="{013F331E-4832-5165-B291-A05999194F36}"/>
+                <a16:creationId xmlns:a16="http://schemas.microsoft.com/office/drawing/2014/main" id="{B21CE2DF-1AC7-F831-EC81-EC7F8177D727}"/>
               </a:ext>
             </a:extLst>
           </p:cNvPr>
@@ -10567,7 +10680,7 @@
           <p:cNvPr id="5" name="TextBox 4">
             <a:extLst>
               <a:ext uri="{FF2B5EF4-FFF2-40B4-BE49-F238E27FC236}">
-                <a16:creationId xmlns:a16="http://schemas.microsoft.com/office/drawing/2014/main" id="{472AB07F-5E2B-3053-09D9-8158BB58A2B9}"/>
+                <a16:creationId xmlns:a16="http://schemas.microsoft.com/office/drawing/2014/main" id="{89A483D5-85A4-E241-B42E-B01C54861B5F}"/>
               </a:ext>
             </a:extLst>
           </p:cNvPr>
@@ -10608,7 +10721,7 @@
           <p:cNvPr id="6" name="Rectangle 5">
             <a:extLst>
               <a:ext uri="{FF2B5EF4-FFF2-40B4-BE49-F238E27FC236}">
-                <a16:creationId xmlns:a16="http://schemas.microsoft.com/office/drawing/2014/main" id="{808334BC-2451-D158-EF26-EDBBC959ABA0}"/>
+                <a16:creationId xmlns:a16="http://schemas.microsoft.com/office/drawing/2014/main" id="{0829CAD7-F9FD-4515-0ED0-E714F1FE2109}"/>
               </a:ext>
             </a:extLst>
           </p:cNvPr>
@@ -10675,7 +10788,7 @@
                 </a:solidFill>
                 <a:latin typeface="Calibri" panose="020F0502020204030204" pitchFamily="34" charset="0"/>
               </a:rPr>
-              <a:t>One message type (ORDERS D.96A), sample files stored in the project, and no partner or ERP connection.</a:t>
+              <a:t>One message type (ORDERS D.96A). Sample files are stored in the project and copied to SFTP for the demo. No partner system or ERP is connected.</a:t>
             </a:r>
           </a:p>
         </p:txBody>
@@ -10685,7 +10798,7 @@
           <p:cNvPr id="7" name="Rectangle 6">
             <a:extLst>
               <a:ext uri="{FF2B5EF4-FFF2-40B4-BE49-F238E27FC236}">
-                <a16:creationId xmlns:a16="http://schemas.microsoft.com/office/drawing/2014/main" id="{738AEE7A-C800-370B-138D-325EC132C2D7}"/>
+                <a16:creationId xmlns:a16="http://schemas.microsoft.com/office/drawing/2014/main" id="{1959FA6D-D366-8B02-BF95-1A9CE5502A9F}"/>
               </a:ext>
             </a:extLst>
           </p:cNvPr>
@@ -10753,7 +10866,7 @@
           <p:cNvPr id="8" name="Rectangle 7">
             <a:extLst>
               <a:ext uri="{FF2B5EF4-FFF2-40B4-BE49-F238E27FC236}">
-                <a16:creationId xmlns:a16="http://schemas.microsoft.com/office/drawing/2014/main" id="{DDC1BC3A-24E4-027D-C3D8-0A3161415C74}"/>
+                <a16:creationId xmlns:a16="http://schemas.microsoft.com/office/drawing/2014/main" id="{8B7F707A-3A5A-5048-F717-13BBBD23FD09}"/>
               </a:ext>
             </a:extLst>
           </p:cNvPr>
@@ -10830,7 +10943,7 @@
           <p:cNvPr id="9" name="Rectangle 8">
             <a:extLst>
               <a:ext uri="{FF2B5EF4-FFF2-40B4-BE49-F238E27FC236}">
-                <a16:creationId xmlns:a16="http://schemas.microsoft.com/office/drawing/2014/main" id="{67F3D4A7-C7FA-F710-1335-D81B3E452417}"/>
+                <a16:creationId xmlns:a16="http://schemas.microsoft.com/office/drawing/2014/main" id="{3B177DFF-FACA-01AA-1598-D3C34F412F63}"/>
               </a:ext>
             </a:extLst>
           </p:cNvPr>
@@ -10898,7 +11011,7 @@
           <p:cNvPr id="10" name="Rectangle 9">
             <a:extLst>
               <a:ext uri="{FF2B5EF4-FFF2-40B4-BE49-F238E27FC236}">
-                <a16:creationId xmlns:a16="http://schemas.microsoft.com/office/drawing/2014/main" id="{D50D8012-48E5-188C-D8D3-1A283DE61448}"/>
+                <a16:creationId xmlns:a16="http://schemas.microsoft.com/office/drawing/2014/main" id="{FF3C2091-B776-F8DE-EA0D-15694B43A416}"/>
               </a:ext>
             </a:extLst>
           </p:cNvPr>
@@ -10975,7 +11088,7 @@
           <p:cNvPr id="11" name="Rectangle 10">
             <a:extLst>
               <a:ext uri="{FF2B5EF4-FFF2-40B4-BE49-F238E27FC236}">
-                <a16:creationId xmlns:a16="http://schemas.microsoft.com/office/drawing/2014/main" id="{6454FCBE-DD05-50C8-FEE1-3DF22323397D}"/>
+                <a16:creationId xmlns:a16="http://schemas.microsoft.com/office/drawing/2014/main" id="{E176879B-C44C-6AA8-3DE1-B0F47DFAC230}"/>
               </a:ext>
             </a:extLst>
           </p:cNvPr>
@@ -11043,7 +11156,7 @@
           <p:cNvPr id="12" name="Rectangle 11">
             <a:extLst>
               <a:ext uri="{FF2B5EF4-FFF2-40B4-BE49-F238E27FC236}">
-                <a16:creationId xmlns:a16="http://schemas.microsoft.com/office/drawing/2014/main" id="{06473E6F-284A-FC4E-9852-5BB622F7D23F}"/>
+                <a16:creationId xmlns:a16="http://schemas.microsoft.com/office/drawing/2014/main" id="{A65494A1-2BD8-931A-9209-8C026A763856}"/>
               </a:ext>
             </a:extLst>
           </p:cNvPr>
@@ -11110,7 +11223,7 @@
                 </a:solidFill>
                 <a:latin typeface="Calibri" panose="020F0502020204030204" pitchFamily="34" charset="0"/>
               </a:rPr>
-              <a:t>In production, partner files travel over SFTP or AS2 with encryption and signing. Credentials are kept in secure properties.</a:t>
+              <a:t>The POC reads and writes order files over SFTP. Credentials are supplied on the SFTP connection and are not stored in the flows. In production, credentials move to secure properties. AS2 remains available for a partner who requires it.</a:t>
             </a:r>
           </a:p>
         </p:txBody>
@@ -11120,7 +11233,7 @@
           <p:cNvPr id="13" name="Rectangle 12">
             <a:extLst>
               <a:ext uri="{FF2B5EF4-FFF2-40B4-BE49-F238E27FC236}">
-                <a16:creationId xmlns:a16="http://schemas.microsoft.com/office/drawing/2014/main" id="{FB97199A-CCC6-92E4-FEF8-0CE19B9EFDBD}"/>
+                <a16:creationId xmlns:a16="http://schemas.microsoft.com/office/drawing/2014/main" id="{BB3BCAAA-2E71-5C27-3DDF-E2AC4A87CF01}"/>
               </a:ext>
             </a:extLst>
           </p:cNvPr>
@@ -11188,7 +11301,7 @@
           <p:cNvPr id="14" name="Rectangle 13">
             <a:extLst>
               <a:ext uri="{FF2B5EF4-FFF2-40B4-BE49-F238E27FC236}">
-                <a16:creationId xmlns:a16="http://schemas.microsoft.com/office/drawing/2014/main" id="{53533C4E-A868-0AD2-7994-504A3A4BFB2E}"/>
+                <a16:creationId xmlns:a16="http://schemas.microsoft.com/office/drawing/2014/main" id="{F01C5B68-3BF7-BEAA-570E-63A2C53B2151}"/>
               </a:ext>
             </a:extLst>
           </p:cNvPr>
@@ -11265,7 +11378,7 @@
           <p:cNvPr id="15" name="Rectangle 14">
             <a:extLst>
               <a:ext uri="{FF2B5EF4-FFF2-40B4-BE49-F238E27FC236}">
-                <a16:creationId xmlns:a16="http://schemas.microsoft.com/office/drawing/2014/main" id="{05AC3118-F549-A528-F7DA-1993167F2A5E}"/>
+                <a16:creationId xmlns:a16="http://schemas.microsoft.com/office/drawing/2014/main" id="{F0ED7764-DA1A-5F57-9883-C9171D193039}"/>
               </a:ext>
             </a:extLst>
           </p:cNvPr>
@@ -11333,7 +11446,7 @@
           <p:cNvPr id="16" name="Rectangle 15">
             <a:extLst>
               <a:ext uri="{FF2B5EF4-FFF2-40B4-BE49-F238E27FC236}">
-                <a16:creationId xmlns:a16="http://schemas.microsoft.com/office/drawing/2014/main" id="{E205232B-FC91-F928-33F4-77B662DF187E}"/>
+                <a16:creationId xmlns:a16="http://schemas.microsoft.com/office/drawing/2014/main" id="{ECA0E665-1FFB-17DA-362A-BBAD48BA206B}"/>
               </a:ext>
             </a:extLst>
           </p:cNvPr>
@@ -11410,7 +11523,7 @@
           <p:cNvPr id="17" name="Rectangle 16">
             <a:extLst>
               <a:ext uri="{FF2B5EF4-FFF2-40B4-BE49-F238E27FC236}">
-                <a16:creationId xmlns:a16="http://schemas.microsoft.com/office/drawing/2014/main" id="{C24D3CD7-58A4-16F5-1EED-FC4F6087455E}"/>
+                <a16:creationId xmlns:a16="http://schemas.microsoft.com/office/drawing/2014/main" id="{A52CFC89-CBC4-FDE9-1BB5-83930D16E839}"/>
               </a:ext>
             </a:extLst>
           </p:cNvPr>
@@ -11476,7 +11589,7 @@
     </p:spTree>
     <p:extLst>
       <p:ext uri="{BB962C8B-B14F-4D97-AF65-F5344CB8AC3E}">
-        <p14:creationId xmlns:p14="http://schemas.microsoft.com/office/powerpoint/2010/main" val="3821017081"/>
+        <p14:creationId xmlns:p14="http://schemas.microsoft.com/office/powerpoint/2010/main" val="1559328986"/>
       </p:ext>
     </p:extLst>
   </p:cSld>
@@ -11508,7 +11621,7 @@
           <p:cNvPr id="2" name="Rectangle 1">
             <a:extLst>
               <a:ext uri="{FF2B5EF4-FFF2-40B4-BE49-F238E27FC236}">
-                <a16:creationId xmlns:a16="http://schemas.microsoft.com/office/drawing/2014/main" id="{ABB22775-28A8-40B2-0A9C-D8DB097236F5}"/>
+                <a16:creationId xmlns:a16="http://schemas.microsoft.com/office/drawing/2014/main" id="{100FCB0F-573E-C37F-8AA7-601A9676FCD2}"/>
               </a:ext>
             </a:extLst>
           </p:cNvPr>
@@ -11583,7 +11696,7 @@
           <p:cNvPr id="3" name="Rectangle 2">
             <a:extLst>
               <a:ext uri="{FF2B5EF4-FFF2-40B4-BE49-F238E27FC236}">
-                <a16:creationId xmlns:a16="http://schemas.microsoft.com/office/drawing/2014/main" id="{39E982C5-0A62-26D6-6DBE-B069E401798E}"/>
+                <a16:creationId xmlns:a16="http://schemas.microsoft.com/office/drawing/2014/main" id="{0BD0F59B-603F-55AE-7A1E-0708FEFCFFB9}"/>
               </a:ext>
             </a:extLst>
           </p:cNvPr>
@@ -11651,7 +11764,7 @@
           <p:cNvPr id="4" name="TextBox 3">
             <a:extLst>
               <a:ext uri="{FF2B5EF4-FFF2-40B4-BE49-F238E27FC236}">
-                <a16:creationId xmlns:a16="http://schemas.microsoft.com/office/drawing/2014/main" id="{A07D2F85-C93B-3150-7615-240B3447DBE5}"/>
+                <a16:creationId xmlns:a16="http://schemas.microsoft.com/office/drawing/2014/main" id="{76E272D5-2E66-B302-B153-7D517BE909AD}"/>
               </a:ext>
             </a:extLst>
           </p:cNvPr>
@@ -11691,7 +11804,7 @@
           <p:cNvPr id="5" name="TextBox 4">
             <a:extLst>
               <a:ext uri="{FF2B5EF4-FFF2-40B4-BE49-F238E27FC236}">
-                <a16:creationId xmlns:a16="http://schemas.microsoft.com/office/drawing/2014/main" id="{5F0A505F-61C6-AEB9-5418-0DBAC52B9771}"/>
+                <a16:creationId xmlns:a16="http://schemas.microsoft.com/office/drawing/2014/main" id="{88AE5E6B-8302-677D-61BA-D6021B45255B}"/>
               </a:ext>
             </a:extLst>
           </p:cNvPr>
@@ -11732,7 +11845,7 @@
           <p:cNvPr id="6" name="TextBox 5">
             <a:extLst>
               <a:ext uri="{FF2B5EF4-FFF2-40B4-BE49-F238E27FC236}">
-                <a16:creationId xmlns:a16="http://schemas.microsoft.com/office/drawing/2014/main" id="{D6821B26-3ED6-7417-0CF2-BF0F25847E80}"/>
+                <a16:creationId xmlns:a16="http://schemas.microsoft.com/office/drawing/2014/main" id="{4F4162E9-21AB-76DE-4D57-1D1E3A19E73F}"/>
               </a:ext>
             </a:extLst>
           </p:cNvPr>
@@ -11762,7 +11875,7 @@
                 </a:solidFill>
                 <a:latin typeface="Calibri" panose="020F0502020204030204" pitchFamily="34" charset="0"/>
               </a:rPr>
-              <a:t>The POC already contains the parts that carry into production: connector configuration, canonical model, mapping, and rules. Production adds partner connectivity, acknowledgments, and operations, delivered in three phases.</a:t>
+              <a:t>The POC already contains the parts that carry into production: EDIFACT configuration, SFTP file exchange, canonical model, mapping, and rules. Production adds the partner account, acknowledgments, and delivery to the ERP, in three phases.</a:t>
             </a:r>
           </a:p>
         </p:txBody>
@@ -11772,7 +11885,7 @@
           <p:cNvPr id="7" name="Rectangle 6">
             <a:extLst>
               <a:ext uri="{FF2B5EF4-FFF2-40B4-BE49-F238E27FC236}">
-                <a16:creationId xmlns:a16="http://schemas.microsoft.com/office/drawing/2014/main" id="{F3C5D6A3-CB13-1000-23D7-528419ABFFA3}"/>
+                <a16:creationId xmlns:a16="http://schemas.microsoft.com/office/drawing/2014/main" id="{D667BCA4-57D5-0B13-74C7-6C618025A5B8}"/>
               </a:ext>
             </a:extLst>
           </p:cNvPr>
@@ -11839,7 +11952,7 @@
                 </a:solidFill>
                 <a:latin typeface="Calibri" panose="020F0502020204030204" pitchFamily="34" charset="0"/>
               </a:rPr>
-              <a:t>- Partner connectivity over SFTP or AS2</a:t>
+              <a:t>- A partner SFTP account, separate from the demo directories</a:t>
             </a:r>
           </a:p>
           <a:p>
@@ -11882,7 +11995,7 @@
           <p:cNvPr id="8" name="Rectangle 7">
             <a:extLst>
               <a:ext uri="{FF2B5EF4-FFF2-40B4-BE49-F238E27FC236}">
-                <a16:creationId xmlns:a16="http://schemas.microsoft.com/office/drawing/2014/main" id="{C8B3FFBD-2E56-DCBC-E64C-DF6FEE08AA37}"/>
+                <a16:creationId xmlns:a16="http://schemas.microsoft.com/office/drawing/2014/main" id="{9BF773F9-2A93-AE83-0D31-6AE254BAD2B3}"/>
               </a:ext>
             </a:extLst>
           </p:cNvPr>
@@ -11950,7 +12063,7 @@
           <p:cNvPr id="9" name="Straight Connector 8">
             <a:extLst>
               <a:ext uri="{FF2B5EF4-FFF2-40B4-BE49-F238E27FC236}">
-                <a16:creationId xmlns:a16="http://schemas.microsoft.com/office/drawing/2014/main" id="{0D2A780D-73F9-58E4-43EE-D62265D75B48}"/>
+                <a16:creationId xmlns:a16="http://schemas.microsoft.com/office/drawing/2014/main" id="{ADD61EBF-D006-E0F6-2D22-3CFDD807DFEE}"/>
               </a:ext>
             </a:extLst>
           </p:cNvPr>
@@ -11992,7 +12105,7 @@
           <p:cNvPr id="10" name="Rectangle 9">
             <a:extLst>
               <a:ext uri="{FF2B5EF4-FFF2-40B4-BE49-F238E27FC236}">
-                <a16:creationId xmlns:a16="http://schemas.microsoft.com/office/drawing/2014/main" id="{0C41113E-DFF3-39CF-C731-35965987AC6C}"/>
+                <a16:creationId xmlns:a16="http://schemas.microsoft.com/office/drawing/2014/main" id="{4640E26F-1603-A29C-F0B8-EE353E3F20CA}"/>
               </a:ext>
             </a:extLst>
           </p:cNvPr>
@@ -12091,7 +12204,7 @@
           <p:cNvPr id="11" name="Rectangle 10">
             <a:extLst>
               <a:ext uri="{FF2B5EF4-FFF2-40B4-BE49-F238E27FC236}">
-                <a16:creationId xmlns:a16="http://schemas.microsoft.com/office/drawing/2014/main" id="{9C7AA0E3-B791-3FB9-10B1-DA7AC6425826}"/>
+                <a16:creationId xmlns:a16="http://schemas.microsoft.com/office/drawing/2014/main" id="{74FCCC68-3934-557E-AAD0-46C6E60F2082}"/>
               </a:ext>
             </a:extLst>
           </p:cNvPr>
@@ -12159,7 +12272,7 @@
           <p:cNvPr id="12" name="Straight Connector 11">
             <a:extLst>
               <a:ext uri="{FF2B5EF4-FFF2-40B4-BE49-F238E27FC236}">
-                <a16:creationId xmlns:a16="http://schemas.microsoft.com/office/drawing/2014/main" id="{039AAB5E-82B3-3B29-8B5E-397D8170CE78}"/>
+                <a16:creationId xmlns:a16="http://schemas.microsoft.com/office/drawing/2014/main" id="{A9C6BD1A-145D-5082-E1CA-44BD39787A30}"/>
               </a:ext>
             </a:extLst>
           </p:cNvPr>
@@ -12201,7 +12314,7 @@
           <p:cNvPr id="13" name="Rectangle 12">
             <a:extLst>
               <a:ext uri="{FF2B5EF4-FFF2-40B4-BE49-F238E27FC236}">
-                <a16:creationId xmlns:a16="http://schemas.microsoft.com/office/drawing/2014/main" id="{BE405DDF-1E28-AAC8-DCB5-C9A44E3AFFA0}"/>
+                <a16:creationId xmlns:a16="http://schemas.microsoft.com/office/drawing/2014/main" id="{2EFD700E-6150-FE37-1B11-15A678243047}"/>
               </a:ext>
             </a:extLst>
           </p:cNvPr>
@@ -12300,7 +12413,7 @@
           <p:cNvPr id="14" name="Rectangle 13">
             <a:extLst>
               <a:ext uri="{FF2B5EF4-FFF2-40B4-BE49-F238E27FC236}">
-                <a16:creationId xmlns:a16="http://schemas.microsoft.com/office/drawing/2014/main" id="{B2D09AEB-FD17-706B-50B3-B1219B3CE863}"/>
+                <a16:creationId xmlns:a16="http://schemas.microsoft.com/office/drawing/2014/main" id="{CB303A89-AD4E-729C-64E3-742DED2BEC90}"/>
               </a:ext>
             </a:extLst>
           </p:cNvPr>
@@ -12366,7 +12479,7 @@
     </p:spTree>
     <p:extLst>
       <p:ext uri="{BB962C8B-B14F-4D97-AF65-F5344CB8AC3E}">
-        <p14:creationId xmlns:p14="http://schemas.microsoft.com/office/powerpoint/2010/main" val="3269263033"/>
+        <p14:creationId xmlns:p14="http://schemas.microsoft.com/office/powerpoint/2010/main" val="1330113415"/>
       </p:ext>
     </p:extLst>
   </p:cSld>
